--- a/code/powerpoint-example.pptx
+++ b/code/powerpoint-example.pptx
@@ -9,6 +9,7 @@
     <p:sldId id="257" r:id="rId3"/>
     <p:sldId id="258" r:id="rId4"/>
     <p:sldId id="259" r:id="rId5"/>
+    <p:sldId id="260" r:id="rId6"/>
   </p:sldIdLst>
   <p:sldSz cx="9144000" cy="5143500" type="screen16x9"/>
   <p:notesSz cx="6858000" cy="9144000"/>
@@ -3118,7 +3119,7 @@
             </a:pPr>
             <a:r>
               <a:rPr/>
-              <a:t>Untitled</a:t>
+              <a:t>Portland Public Schools Math Proficiency Report</a:t>
             </a:r>
           </a:p>
         </p:txBody>
@@ -3193,7 +3194,67 @@
             </a:pPr>
             <a:r>
               <a:rPr/>
-              <a:t>Quarto</a:t>
+              <a:t>Introduction</a:t>
+            </a:r>
+          </a:p>
+        </p:txBody>
+      </p:sp>
+      <p:pic>
+        <p:nvPicPr>
+          <p:cNvPr descr="portland-public-schools-logo.svg" id="0" name="Picture 1"/>
+          <p:cNvPicPr>
+            <a:picLocks noGrp="1" noChangeAspect="1"/>
+          </p:cNvPicPr>
+          <p:nvPr/>
+        </p:nvPicPr>
+        <p:blipFill>
+          <a:blip r:embed="rId2"/>
+          <a:stretch>
+            <a:fillRect/>
+          </a:stretch>
+        </p:blipFill>
+        <p:spPr bwMode="auto">
+          <a:xfrm>
+            <a:off x="3124200" y="1193800"/>
+            <a:ext cx="2882900" cy="2882900"/>
+          </a:xfrm>
+          <a:prstGeom prst="rect">
+            <a:avLst/>
+          </a:prstGeom>
+          <a:noFill/>
+          <a:ln w="9525">
+            <a:noFill/>
+            <a:headEnd/>
+            <a:tailEnd/>
+          </a:ln>
+        </p:spPr>
+      </p:pic>
+      <p:sp>
+        <p:nvSpPr>
+          <p:cNvPr id="1" name="TextBox 3"/>
+          <p:cNvSpPr txBox="1"/>
+          <p:nvPr/>
+        </p:nvSpPr>
+        <p:spPr>
+          <a:xfrm>
+            <a:off x="457200" y="4076700"/>
+            <a:ext cx="8229600" cy="508000"/>
+          </a:xfrm>
+          <a:prstGeom prst="rect">
+            <a:avLst/>
+          </a:prstGeom>
+          <a:noFill/>
+        </p:spPr>
+        <p:txBody>
+          <a:bodyPr/>
+          <a:lstStyle/>
+          <a:p>
+            <a:pPr lvl="0" indent="0" marL="0" algn="ctr">
+              <a:buNone/>
+            </a:pPr>
+            <a:r>
+              <a:rPr/>
+              <a:t>Portland Public Schools</a:t>
             </a:r>
           </a:p>
         </p:txBody>
@@ -3218,17 +3279,41 @@
             </a:pPr>
             <a:r>
               <a:rPr/>
-              <a:t>Quarto enables you to weave together content and executable code into a finished presentation. To learn more about Quarto presentations see </a:t>
+              <a:t>This is a report on math proficiency results in </a:t>
             </a:r>
             <a:r>
               <a:rPr>
-                <a:hlinkClick r:id="rId2"/>
+                <a:hlinkClick r:id="rId3"/>
               </a:rPr>
-              <a:t>https://quarto.org/docs/presentations/</a:t>
+              <a:t>Portland Public Schools (PPS)</a:t>
             </a:r>
             <a:r>
               <a:rPr/>
-              <a:t>.</a:t>
+              <a:t>. The PPS mission statement is as follows:</a:t>
+            </a:r>
+          </a:p>
+          <a:p>
+            <a:pPr lvl="0" indent="0" marL="1270000">
+              <a:buNone/>
+            </a:pPr>
+            <a:r>
+              <a:rPr sz="2000"/>
+              <a:t>We provide rigorous, high-quality academic learning experiences that are inclusive and joyful. We disrupt racial inequities to create vibrant environments for every student to demonstrate excellence.</a:t>
+            </a:r>
+            <a:r>
+              <a:rPr sz="2000" baseline="30000">
+                <a:hlinkClick r:id="rId4" action="ppaction://hlinksldjump"/>
+              </a:rPr>
+              <a:t>1</a:t>
+            </a:r>
+          </a:p>
+          <a:p>
+            <a:pPr lvl="0" indent="0" marL="0">
+              <a:buNone/>
+            </a:pPr>
+            <a:r>
+              <a:rPr/>
+              <a:t>Hello hello hello!</a:t>
             </a:r>
           </a:p>
         </p:txBody>
@@ -3275,54 +3360,67 @@
             </a:pPr>
             <a:r>
               <a:rPr/>
-              <a:t>Bullets</a:t>
-            </a:r>
-          </a:p>
-        </p:txBody>
-      </p:sp>
-      <p:sp>
-        <p:nvSpPr>
-          <p:cNvPr id="3" name="Content Placeholder 2"/>
-          <p:cNvSpPr>
-            <a:spLocks noGrp="1"/>
-          </p:cNvSpPr>
-          <p:nvPr>
-            <p:ph idx="1"/>
-          </p:nvPr>
-        </p:nvSpPr>
-        <p:spPr/>
+              <a:t>Plot</a:t>
+            </a:r>
+          </a:p>
+        </p:txBody>
+      </p:sp>
+      <p:pic>
+        <p:nvPicPr>
+          <p:cNvPr descr="powerpoint-example_files/figure-pptx/unnamed-chunk-4-1.png" id="0" name="Picture 1"/>
+          <p:cNvPicPr>
+            <a:picLocks noGrp="1" noChangeAspect="1"/>
+          </p:cNvPicPr>
+          <p:nvPr/>
+        </p:nvPicPr>
+        <p:blipFill>
+          <a:blip r:embed="rId2"/>
+          <a:stretch>
+            <a:fillRect/>
+          </a:stretch>
+        </p:blipFill>
+        <p:spPr bwMode="auto">
+          <a:xfrm>
+            <a:off x="1689100" y="1193800"/>
+            <a:ext cx="5765800" cy="2882900"/>
+          </a:xfrm>
+          <a:prstGeom prst="rect">
+            <a:avLst/>
+          </a:prstGeom>
+          <a:noFill/>
+          <a:ln w="9525">
+            <a:noFill/>
+            <a:headEnd/>
+            <a:tailEnd/>
+          </a:ln>
+        </p:spPr>
+      </p:pic>
+      <p:sp>
+        <p:nvSpPr>
+          <p:cNvPr id="1" name="TextBox 3"/>
+          <p:cNvSpPr txBox="1"/>
+          <p:nvPr/>
+        </p:nvSpPr>
+        <p:spPr>
+          <a:xfrm>
+            <a:off x="457200" y="4076700"/>
+            <a:ext cx="8229600" cy="508000"/>
+          </a:xfrm>
+          <a:prstGeom prst="rect">
+            <a:avLst/>
+          </a:prstGeom>
+          <a:noFill/>
+        </p:spPr>
         <p:txBody>
           <a:bodyPr/>
           <a:lstStyle/>
           <a:p>
-            <a:pPr lvl="0" indent="0" marL="0">
+            <a:pPr lvl="0" indent="0" marL="0" algn="ctr">
               <a:buNone/>
             </a:pPr>
             <a:r>
               <a:rPr/>
-              <a:t>When you click the </a:t>
-            </a:r>
-            <a:r>
-              <a:rPr b="1"/>
-              <a:t>Render</a:t>
-            </a:r>
-            <a:r>
-              <a:rPr/>
-              <a:t> button a document will be generated that includes:</a:t>
-            </a:r>
-          </a:p>
-          <a:p>
-            <a:pPr lvl="0"/>
-            <a:r>
-              <a:rPr/>
-              <a:t>Content authored with markdown</a:t>
-            </a:r>
-          </a:p>
-          <a:p>
-            <a:pPr lvl="0"/>
-            <a:r>
-              <a:rPr/>
-              <a:t>Output from executable code</a:t>
+              <a:t>Chart showing growth in math proficiency for PPS schools from 2018-2019 to 2021-2022</a:t>
             </a:r>
           </a:p>
         </p:txBody>
@@ -3359,7 +3457,12 @@
             <p:ph type="title"/>
           </p:nvPr>
         </p:nvSpPr>
-        <p:spPr/>
+        <p:spPr>
+          <a:xfrm>
+            <a:off x="457201" y="204787"/>
+            <a:ext cx="3008313" cy="871538"/>
+          </a:xfrm>
+        </p:spPr>
         <p:txBody>
           <a:bodyPr/>
           <a:lstStyle/>
@@ -3369,7 +3472,3166 @@
             </a:pPr>
             <a:r>
               <a:rPr/>
-              <a:t>Code</a:t>
+              <a:t>Table</a:t>
+            </a:r>
+          </a:p>
+        </p:txBody>
+      </p:sp>
+      <p:sp>
+        <p:nvSpPr>
+          <p:cNvPr id="4" name="Text Placeholder 3"/>
+          <p:cNvSpPr>
+            <a:spLocks noGrp="1"/>
+          </p:cNvSpPr>
+          <p:nvPr>
+            <p:ph idx="2" sz="half" type="body"/>
+          </p:nvPr>
+        </p:nvSpPr>
+        <p:spPr/>
+        <p:txBody>
+          <a:bodyPr/>
+          <a:lstStyle/>
+          <a:p>
+            <a:pPr lvl="0" indent="0" marL="0">
+              <a:buNone/>
+            </a:pPr>
+            <a:r>
+              <a:rPr/>
+              <a:t>The following table shows math proficiency in 2018-2019 and 2021-2022 for all PPS schools. If you want to see Winterhaven School, you can use the search bar to find it.</a:t>
+            </a:r>
+          </a:p>
+        </p:txBody>
+      </p:sp>
+      <p:graphicFrame>
+        <p:nvGraphicFramePr>
+          <p:cNvPr id="6" name="Content Placeholder 5"/>
+          <p:cNvGraphicFramePr>
+            <a:graphicFrameLocks noGrp="1"/>
+          </p:cNvGraphicFramePr>
+          <p:nvPr>
+            <p:ph idx="1"/>
+          </p:nvPr>
+        </p:nvGraphicFramePr>
+        <p:xfrm>
+          <a:off x="3568700" y="203200"/>
+          <a:ext cx="5105400" cy="4381500"/>
+        </p:xfrm>
+        <a:graphic>
+          <a:graphicData uri="http://schemas.openxmlformats.org/drawingml/2006/table">
+            <a:tbl>
+              <a:tblPr firstRow="1" bandRow="1">
+                <a:tableStyleId>{5C22544A-7EE6-4342-B048-85BDC9FD1C3A}</a:tableStyleId>
+              </a:tblPr>
+              <a:tblGrid>
+                <a:gridCol w="1701800"/>
+                <a:gridCol w="1701800"/>
+                <a:gridCol w="1701800"/>
+              </a:tblGrid>
+              <a:tr h="0">
+                <a:tc>
+                  <a:txBody>
+                    <a:bodyPr/>
+                    <a:lstStyle/>
+                    <a:p>
+                      <a:pPr lvl="0" indent="0" marL="0">
+                        <a:buNone/>
+                      </a:pPr>
+                      <a:r>
+                        <a:rPr/>
+                        <a:t>School</a:t>
+                      </a:r>
+                    </a:p>
+                  </a:txBody>
+                  <a:tcPr/>
+                </a:tc>
+                <a:tc>
+                  <a:txBody>
+                    <a:bodyPr/>
+                    <a:lstStyle/>
+                    <a:p>
+                      <a:pPr lvl="0" indent="0" marL="0">
+                        <a:buNone/>
+                      </a:pPr>
+                      <a:r>
+                        <a:rPr/>
+                        <a:t>2018-2019</a:t>
+                      </a:r>
+                    </a:p>
+                  </a:txBody>
+                  <a:tcPr/>
+                </a:tc>
+                <a:tc>
+                  <a:txBody>
+                    <a:bodyPr/>
+                    <a:lstStyle/>
+                    <a:p>
+                      <a:pPr lvl="0" indent="0" marL="0">
+                        <a:buNone/>
+                      </a:pPr>
+                      <a:r>
+                        <a:rPr/>
+                        <a:t>2021-2022</a:t>
+                      </a:r>
+                    </a:p>
+                  </a:txBody>
+                  <a:tcPr/>
+                </a:tc>
+              </a:tr>
+              <a:tr h="0">
+                <a:tc>
+                  <a:txBody>
+                    <a:bodyPr/>
+                    <a:lstStyle/>
+                    <a:p>
+                      <a:pPr lvl="0" indent="0" marL="0">
+                        <a:buNone/>
+                      </a:pPr>
+                      <a:r>
+                        <a:rPr/>
+                        <a:t>Abernethy Elementary School</a:t>
+                      </a:r>
+                    </a:p>
+                  </a:txBody>
+                </a:tc>
+                <a:tc>
+                  <a:txBody>
+                    <a:bodyPr/>
+                    <a:lstStyle/>
+                    <a:p>
+                      <a:pPr lvl="0" indent="0" marL="0">
+                        <a:buNone/>
+                      </a:pPr>
+                      <a:r>
+                        <a:rPr/>
+                        <a:t>71%</a:t>
+                      </a:r>
+                    </a:p>
+                  </a:txBody>
+                </a:tc>
+                <a:tc>
+                  <a:txBody>
+                    <a:bodyPr/>
+                    <a:lstStyle/>
+                    <a:p>
+                      <a:pPr lvl="0" indent="0" marL="0">
+                        <a:buNone/>
+                      </a:pPr>
+                      <a:r>
+                        <a:rPr/>
+                        <a:t>79%</a:t>
+                      </a:r>
+                    </a:p>
+                  </a:txBody>
+                </a:tc>
+              </a:tr>
+              <a:tr h="0">
+                <a:tc>
+                  <a:txBody>
+                    <a:bodyPr/>
+                    <a:lstStyle/>
+                    <a:p>
+                      <a:pPr lvl="0" indent="0" marL="0">
+                        <a:buNone/>
+                      </a:pPr>
+                      <a:r>
+                        <a:rPr/>
+                        <a:t>Ainsworth Elementary School</a:t>
+                      </a:r>
+                    </a:p>
+                  </a:txBody>
+                </a:tc>
+                <a:tc>
+                  <a:txBody>
+                    <a:bodyPr/>
+                    <a:lstStyle/>
+                    <a:p>
+                      <a:pPr lvl="0" indent="0" marL="0">
+                        <a:buNone/>
+                      </a:pPr>
+                      <a:r>
+                        <a:rPr/>
+                        <a:t>80%</a:t>
+                      </a:r>
+                    </a:p>
+                  </a:txBody>
+                </a:tc>
+                <a:tc>
+                  <a:txBody>
+                    <a:bodyPr/>
+                    <a:lstStyle/>
+                    <a:p>
+                      <a:pPr lvl="0" indent="0" marL="0">
+                        <a:buNone/>
+                      </a:pPr>
+                      <a:r>
+                        <a:rPr/>
+                        <a:t>68%</a:t>
+                      </a:r>
+                    </a:p>
+                  </a:txBody>
+                </a:tc>
+              </a:tr>
+              <a:tr h="0">
+                <a:tc>
+                  <a:txBody>
+                    <a:bodyPr/>
+                    <a:lstStyle/>
+                    <a:p>
+                      <a:pPr lvl="0" indent="0" marL="0">
+                        <a:buNone/>
+                      </a:pPr>
+                      <a:r>
+                        <a:rPr/>
+                        <a:t>Alameda Elementary School</a:t>
+                      </a:r>
+                    </a:p>
+                  </a:txBody>
+                </a:tc>
+                <a:tc>
+                  <a:txBody>
+                    <a:bodyPr/>
+                    <a:lstStyle/>
+                    <a:p>
+                      <a:pPr lvl="0" indent="0" marL="0">
+                        <a:buNone/>
+                      </a:pPr>
+                      <a:r>
+                        <a:rPr/>
+                        <a:t>83%</a:t>
+                      </a:r>
+                    </a:p>
+                  </a:txBody>
+                </a:tc>
+                <a:tc>
+                  <a:txBody>
+                    <a:bodyPr/>
+                    <a:lstStyle/>
+                    <a:p>
+                      <a:pPr lvl="0" indent="0" marL="0">
+                        <a:buNone/>
+                      </a:pPr>
+                      <a:r>
+                        <a:rPr/>
+                        <a:t>82%</a:t>
+                      </a:r>
+                    </a:p>
+                  </a:txBody>
+                </a:tc>
+              </a:tr>
+              <a:tr h="0">
+                <a:tc>
+                  <a:txBody>
+                    <a:bodyPr/>
+                    <a:lstStyle/>
+                    <a:p>
+                      <a:pPr lvl="0" indent="0" marL="0">
+                        <a:buNone/>
+                      </a:pPr>
+                      <a:r>
+                        <a:rPr/>
+                        <a:t>Arleta Elementary School</a:t>
+                      </a:r>
+                    </a:p>
+                  </a:txBody>
+                </a:tc>
+                <a:tc>
+                  <a:txBody>
+                    <a:bodyPr/>
+                    <a:lstStyle/>
+                    <a:p>
+                      <a:pPr lvl="0" indent="0" marL="0">
+                        <a:buNone/>
+                      </a:pPr>
+                      <a:r>
+                        <a:rPr/>
+                        <a:t>42%</a:t>
+                      </a:r>
+                    </a:p>
+                  </a:txBody>
+                </a:tc>
+                <a:tc>
+                  <a:txBody>
+                    <a:bodyPr/>
+                    <a:lstStyle/>
+                    <a:p>
+                      <a:pPr lvl="0" indent="0" marL="0">
+                        <a:buNone/>
+                      </a:pPr>
+                      <a:r>
+                        <a:rPr/>
+                        <a:t>52%</a:t>
+                      </a:r>
+                    </a:p>
+                  </a:txBody>
+                </a:tc>
+              </a:tr>
+              <a:tr h="0">
+                <a:tc>
+                  <a:txBody>
+                    <a:bodyPr/>
+                    <a:lstStyle/>
+                    <a:p>
+                      <a:pPr lvl="0" indent="0" marL="0">
+                        <a:buNone/>
+                      </a:pPr>
+                      <a:r>
+                        <a:rPr/>
+                        <a:t>Astor Elementary School</a:t>
+                      </a:r>
+                    </a:p>
+                  </a:txBody>
+                </a:tc>
+                <a:tc>
+                  <a:txBody>
+                    <a:bodyPr/>
+                    <a:lstStyle/>
+                    <a:p>
+                      <a:pPr lvl="0" indent="0" marL="0">
+                        <a:buNone/>
+                      </a:pPr>
+                      <a:r>
+                        <a:rPr/>
+                        <a:t>60%</a:t>
+                      </a:r>
+                    </a:p>
+                  </a:txBody>
+                </a:tc>
+                <a:tc>
+                  <a:txBody>
+                    <a:bodyPr/>
+                    <a:lstStyle/>
+                    <a:p>
+                      <a:pPr lvl="0" indent="0" marL="0">
+                        <a:buNone/>
+                      </a:pPr>
+                      <a:r>
+                        <a:rPr/>
+                        <a:t>64%</a:t>
+                      </a:r>
+                    </a:p>
+                  </a:txBody>
+                </a:tc>
+              </a:tr>
+              <a:tr h="0">
+                <a:tc>
+                  <a:txBody>
+                    <a:bodyPr/>
+                    <a:lstStyle/>
+                    <a:p>
+                      <a:pPr lvl="0" indent="0" marL="0">
+                        <a:buNone/>
+                      </a:pPr>
+                      <a:r>
+                        <a:rPr/>
+                        <a:t>Atkinson Elementary School</a:t>
+                      </a:r>
+                    </a:p>
+                  </a:txBody>
+                </a:tc>
+                <a:tc>
+                  <a:txBody>
+                    <a:bodyPr/>
+                    <a:lstStyle/>
+                    <a:p>
+                      <a:pPr lvl="0" indent="0" marL="0">
+                        <a:buNone/>
+                      </a:pPr>
+                      <a:r>
+                        <a:rPr/>
+                        <a:t>51%</a:t>
+                      </a:r>
+                    </a:p>
+                  </a:txBody>
+                </a:tc>
+                <a:tc>
+                  <a:txBody>
+                    <a:bodyPr/>
+                    <a:lstStyle/>
+                    <a:p>
+                      <a:pPr lvl="0" indent="0" marL="0">
+                        <a:buNone/>
+                      </a:pPr>
+                      <a:r>
+                        <a:rPr/>
+                        <a:t>58%</a:t>
+                      </a:r>
+                    </a:p>
+                  </a:txBody>
+                </a:tc>
+              </a:tr>
+              <a:tr h="0">
+                <a:tc>
+                  <a:txBody>
+                    <a:bodyPr/>
+                    <a:lstStyle/>
+                    <a:p>
+                      <a:pPr lvl="0" indent="0" marL="0">
+                        <a:buNone/>
+                      </a:pPr>
+                      <a:r>
+                        <a:rPr/>
+                        <a:t>Beach Elementary School</a:t>
+                      </a:r>
+                    </a:p>
+                  </a:txBody>
+                </a:tc>
+                <a:tc>
+                  <a:txBody>
+                    <a:bodyPr/>
+                    <a:lstStyle/>
+                    <a:p>
+                      <a:pPr lvl="0" indent="0" marL="0">
+                        <a:buNone/>
+                      </a:pPr>
+                      <a:r>
+                        <a:rPr/>
+                        <a:t>57%</a:t>
+                      </a:r>
+                    </a:p>
+                  </a:txBody>
+                </a:tc>
+                <a:tc>
+                  <a:txBody>
+                    <a:bodyPr/>
+                    <a:lstStyle/>
+                    <a:p>
+                      <a:pPr lvl="0" indent="0" marL="0">
+                        <a:buNone/>
+                      </a:pPr>
+                      <a:r>
+                        <a:rPr/>
+                        <a:t>74%</a:t>
+                      </a:r>
+                    </a:p>
+                  </a:txBody>
+                </a:tc>
+              </a:tr>
+              <a:tr h="0">
+                <a:tc>
+                  <a:txBody>
+                    <a:bodyPr/>
+                    <a:lstStyle/>
+                    <a:p>
+                      <a:pPr lvl="0" indent="0" marL="0">
+                        <a:buNone/>
+                      </a:pPr>
+                      <a:r>
+                        <a:rPr/>
+                        <a:t>Beverly Cleary School</a:t>
+                      </a:r>
+                    </a:p>
+                  </a:txBody>
+                </a:tc>
+                <a:tc>
+                  <a:txBody>
+                    <a:bodyPr/>
+                    <a:lstStyle/>
+                    <a:p>
+                      <a:pPr lvl="0" indent="0" marL="0">
+                        <a:buNone/>
+                      </a:pPr>
+                      <a:r>
+                        <a:rPr/>
+                        <a:t>68%</a:t>
+                      </a:r>
+                    </a:p>
+                  </a:txBody>
+                </a:tc>
+                <a:tc>
+                  <a:txBody>
+                    <a:bodyPr/>
+                    <a:lstStyle/>
+                    <a:p>
+                      <a:pPr lvl="0" indent="0" marL="0">
+                        <a:buNone/>
+                      </a:pPr>
+                      <a:r>
+                        <a:rPr/>
+                        <a:t>75%</a:t>
+                      </a:r>
+                    </a:p>
+                  </a:txBody>
+                </a:tc>
+              </a:tr>
+              <a:tr h="0">
+                <a:tc>
+                  <a:txBody>
+                    <a:bodyPr/>
+                    <a:lstStyle/>
+                    <a:p>
+                      <a:pPr lvl="0" indent="0" marL="0">
+                        <a:buNone/>
+                      </a:pPr>
+                      <a:r>
+                        <a:rPr/>
+                        <a:t>Boise-Eliot Elementary School</a:t>
+                      </a:r>
+                    </a:p>
+                  </a:txBody>
+                </a:tc>
+                <a:tc>
+                  <a:txBody>
+                    <a:bodyPr/>
+                    <a:lstStyle/>
+                    <a:p>
+                      <a:pPr lvl="0" indent="0" marL="0">
+                        <a:buNone/>
+                      </a:pPr>
+                      <a:r>
+                        <a:rPr/>
+                        <a:t>18%</a:t>
+                      </a:r>
+                    </a:p>
+                  </a:txBody>
+                </a:tc>
+                <a:tc>
+                  <a:txBody>
+                    <a:bodyPr/>
+                    <a:lstStyle/>
+                    <a:p>
+                      <a:pPr lvl="0" indent="0" marL="0">
+                        <a:buNone/>
+                      </a:pPr>
+                      <a:r>
+                        <a:rPr/>
+                        <a:t>21%</a:t>
+                      </a:r>
+                    </a:p>
+                  </a:txBody>
+                </a:tc>
+              </a:tr>
+              <a:tr h="0">
+                <a:tc>
+                  <a:txBody>
+                    <a:bodyPr/>
+                    <a:lstStyle/>
+                    <a:p>
+                      <a:pPr lvl="0" indent="0" marL="0">
+                        <a:buNone/>
+                      </a:pPr>
+                      <a:r>
+                        <a:rPr/>
+                        <a:t>Bridger Elementary School</a:t>
+                      </a:r>
+                    </a:p>
+                  </a:txBody>
+                </a:tc>
+                <a:tc>
+                  <a:txBody>
+                    <a:bodyPr/>
+                    <a:lstStyle/>
+                    <a:p>
+                      <a:pPr lvl="0" indent="0" marL="0">
+                        <a:buNone/>
+                      </a:pPr>
+                      <a:r>
+                        <a:rPr/>
+                        <a:t>60%</a:t>
+                      </a:r>
+                    </a:p>
+                  </a:txBody>
+                </a:tc>
+                <a:tc>
+                  <a:txBody>
+                    <a:bodyPr/>
+                    <a:lstStyle/>
+                    <a:p>
+                      <a:pPr lvl="0" indent="0" marL="0">
+                        <a:buNone/>
+                      </a:pPr>
+                      <a:r>
+                        <a:rPr/>
+                        <a:t>34%</a:t>
+                      </a:r>
+                    </a:p>
+                  </a:txBody>
+                </a:tc>
+              </a:tr>
+              <a:tr h="0">
+                <a:tc>
+                  <a:txBody>
+                    <a:bodyPr/>
+                    <a:lstStyle/>
+                    <a:p>
+                      <a:pPr lvl="0" indent="0" marL="0">
+                        <a:buNone/>
+                      </a:pPr>
+                      <a:r>
+                        <a:rPr/>
+                        <a:t>Bridlemile Elementary School</a:t>
+                      </a:r>
+                    </a:p>
+                  </a:txBody>
+                </a:tc>
+                <a:tc>
+                  <a:txBody>
+                    <a:bodyPr/>
+                    <a:lstStyle/>
+                    <a:p>
+                      <a:pPr lvl="0" indent="0" marL="0">
+                        <a:buNone/>
+                      </a:pPr>
+                      <a:r>
+                        <a:rPr/>
+                        <a:t>68%</a:t>
+                      </a:r>
+                    </a:p>
+                  </a:txBody>
+                </a:tc>
+                <a:tc>
+                  <a:txBody>
+                    <a:bodyPr/>
+                    <a:lstStyle/>
+                    <a:p>
+                      <a:pPr lvl="0" indent="0" marL="0">
+                        <a:buNone/>
+                      </a:pPr>
+                      <a:r>
+                        <a:rPr/>
+                        <a:t>72%</a:t>
+                      </a:r>
+                    </a:p>
+                  </a:txBody>
+                </a:tc>
+              </a:tr>
+              <a:tr h="0">
+                <a:tc>
+                  <a:txBody>
+                    <a:bodyPr/>
+                    <a:lstStyle/>
+                    <a:p>
+                      <a:pPr lvl="0" indent="0" marL="0">
+                        <a:buNone/>
+                      </a:pPr>
+                      <a:r>
+                        <a:rPr/>
+                        <a:t>Buckman Elementary School</a:t>
+                      </a:r>
+                    </a:p>
+                  </a:txBody>
+                </a:tc>
+                <a:tc>
+                  <a:txBody>
+                    <a:bodyPr/>
+                    <a:lstStyle/>
+                    <a:p>
+                      <a:pPr lvl="0" indent="0" marL="0">
+                        <a:buNone/>
+                      </a:pPr>
+                      <a:r>
+                        <a:rPr/>
+                        <a:t>56%</a:t>
+                      </a:r>
+                    </a:p>
+                  </a:txBody>
+                </a:tc>
+                <a:tc>
+                  <a:txBody>
+                    <a:bodyPr/>
+                    <a:lstStyle/>
+                    <a:p>
+                      <a:pPr lvl="0" indent="0" marL="0">
+                        <a:buNone/>
+                      </a:pPr>
+                      <a:r>
+                        <a:rPr/>
+                        <a:t>49%</a:t>
+                      </a:r>
+                    </a:p>
+                  </a:txBody>
+                </a:tc>
+              </a:tr>
+              <a:tr h="0">
+                <a:tc>
+                  <a:txBody>
+                    <a:bodyPr/>
+                    <a:lstStyle/>
+                    <a:p>
+                      <a:pPr lvl="0" indent="0" marL="0">
+                        <a:buNone/>
+                      </a:pPr>
+                      <a:r>
+                        <a:rPr/>
+                        <a:t>Capitol Hill Elementary School</a:t>
+                      </a:r>
+                    </a:p>
+                  </a:txBody>
+                </a:tc>
+                <a:tc>
+                  <a:txBody>
+                    <a:bodyPr/>
+                    <a:lstStyle/>
+                    <a:p>
+                      <a:pPr lvl="0" indent="0" marL="0">
+                        <a:buNone/>
+                      </a:pPr>
+                      <a:r>
+                        <a:rPr/>
+                        <a:t>66%</a:t>
+                      </a:r>
+                    </a:p>
+                  </a:txBody>
+                </a:tc>
+                <a:tc>
+                  <a:txBody>
+                    <a:bodyPr/>
+                    <a:lstStyle/>
+                    <a:p>
+                      <a:pPr lvl="0" indent="0" marL="0">
+                        <a:buNone/>
+                      </a:pPr>
+                      <a:r>
+                        <a:rPr/>
+                        <a:t>67%</a:t>
+                      </a:r>
+                    </a:p>
+                  </a:txBody>
+                </a:tc>
+              </a:tr>
+              <a:tr h="0">
+                <a:tc>
+                  <a:txBody>
+                    <a:bodyPr/>
+                    <a:lstStyle/>
+                    <a:p>
+                      <a:pPr lvl="0" indent="0" marL="0">
+                        <a:buNone/>
+                      </a:pPr>
+                      <a:r>
+                        <a:rPr/>
+                        <a:t>Cesar Chavez K-8 School</a:t>
+                      </a:r>
+                    </a:p>
+                  </a:txBody>
+                </a:tc>
+                <a:tc>
+                  <a:txBody>
+                    <a:bodyPr/>
+                    <a:lstStyle/>
+                    <a:p>
+                      <a:pPr lvl="0" indent="0" marL="0">
+                        <a:buNone/>
+                      </a:pPr>
+                      <a:r>
+                        <a:rPr/>
+                        <a:t>26%</a:t>
+                      </a:r>
+                    </a:p>
+                  </a:txBody>
+                </a:tc>
+                <a:tc>
+                  <a:txBody>
+                    <a:bodyPr/>
+                    <a:lstStyle/>
+                    <a:p>
+                      <a:pPr lvl="0" indent="0" marL="0">
+                        <a:buNone/>
+                      </a:pPr>
+                      <a:r>
+                        <a:rPr/>
+                        <a:t>13%</a:t>
+                      </a:r>
+                    </a:p>
+                  </a:txBody>
+                </a:tc>
+              </a:tr>
+              <a:tr h="0">
+                <a:tc>
+                  <a:txBody>
+                    <a:bodyPr/>
+                    <a:lstStyle/>
+                    <a:p>
+                      <a:pPr lvl="0" indent="0" marL="0">
+                        <a:buNone/>
+                      </a:pPr>
+                      <a:r>
+                        <a:rPr/>
+                        <a:t>Chapman Elementary School</a:t>
+                      </a:r>
+                    </a:p>
+                  </a:txBody>
+                </a:tc>
+                <a:tc>
+                  <a:txBody>
+                    <a:bodyPr/>
+                    <a:lstStyle/>
+                    <a:p>
+                      <a:pPr lvl="0" indent="0" marL="0">
+                        <a:buNone/>
+                      </a:pPr>
+                      <a:r>
+                        <a:rPr/>
+                        <a:t>70%</a:t>
+                      </a:r>
+                    </a:p>
+                  </a:txBody>
+                </a:tc>
+                <a:tc>
+                  <a:txBody>
+                    <a:bodyPr/>
+                    <a:lstStyle/>
+                    <a:p>
+                      <a:pPr lvl="0" indent="0" marL="0">
+                        <a:buNone/>
+                      </a:pPr>
+                      <a:r>
+                        <a:rPr/>
+                        <a:t>54%</a:t>
+                      </a:r>
+                    </a:p>
+                  </a:txBody>
+                </a:tc>
+              </a:tr>
+              <a:tr h="0">
+                <a:tc>
+                  <a:txBody>
+                    <a:bodyPr/>
+                    <a:lstStyle/>
+                    <a:p>
+                      <a:pPr lvl="0" indent="0" marL="0">
+                        <a:buNone/>
+                      </a:pPr>
+                      <a:r>
+                        <a:rPr/>
+                        <a:t>Chief Joseph Elementary School</a:t>
+                      </a:r>
+                    </a:p>
+                  </a:txBody>
+                </a:tc>
+                <a:tc>
+                  <a:txBody>
+                    <a:bodyPr/>
+                    <a:lstStyle/>
+                    <a:p>
+                      <a:pPr lvl="0" indent="0" marL="0">
+                        <a:buNone/>
+                      </a:pPr>
+                      <a:r>
+                        <a:rPr/>
+                        <a:t>51%</a:t>
+                      </a:r>
+                    </a:p>
+                  </a:txBody>
+                </a:tc>
+                <a:tc>
+                  <a:txBody>
+                    <a:bodyPr/>
+                    <a:lstStyle/>
+                    <a:p>
+                      <a:pPr lvl="0" indent="0" marL="0">
+                        <a:buNone/>
+                      </a:pPr>
+                      <a:r>
+                        <a:rPr/>
+                        <a:t>50%</a:t>
+                      </a:r>
+                    </a:p>
+                  </a:txBody>
+                </a:tc>
+              </a:tr>
+              <a:tr h="0">
+                <a:tc>
+                  <a:txBody>
+                    <a:bodyPr/>
+                    <a:lstStyle/>
+                    <a:p>
+                      <a:pPr lvl="0" indent="0" marL="0">
+                        <a:buNone/>
+                      </a:pPr>
+                      <a:r>
+                        <a:rPr/>
+                        <a:t>Creative Science School</a:t>
+                      </a:r>
+                    </a:p>
+                  </a:txBody>
+                </a:tc>
+                <a:tc>
+                  <a:txBody>
+                    <a:bodyPr/>
+                    <a:lstStyle/>
+                    <a:p>
+                      <a:pPr lvl="0" indent="0" marL="0">
+                        <a:buNone/>
+                      </a:pPr>
+                      <a:r>
+                        <a:rPr/>
+                        <a:t>38%</a:t>
+                      </a:r>
+                    </a:p>
+                  </a:txBody>
+                </a:tc>
+                <a:tc>
+                  <a:txBody>
+                    <a:bodyPr/>
+                    <a:lstStyle/>
+                    <a:p>
+                      <a:pPr lvl="0" indent="0" marL="0">
+                        <a:buNone/>
+                      </a:pPr>
+                      <a:r>
+                        <a:rPr/>
+                        <a:t>42%</a:t>
+                      </a:r>
+                    </a:p>
+                  </a:txBody>
+                </a:tc>
+              </a:tr>
+              <a:tr h="0">
+                <a:tc>
+                  <a:txBody>
+                    <a:bodyPr/>
+                    <a:lstStyle/>
+                    <a:p>
+                      <a:pPr lvl="0" indent="0" marL="0">
+                        <a:buNone/>
+                      </a:pPr>
+                      <a:r>
+                        <a:rPr/>
+                        <a:t>Creston Elementary School</a:t>
+                      </a:r>
+                    </a:p>
+                  </a:txBody>
+                </a:tc>
+                <a:tc>
+                  <a:txBody>
+                    <a:bodyPr/>
+                    <a:lstStyle/>
+                    <a:p>
+                      <a:pPr lvl="0" indent="0" marL="0">
+                        <a:buNone/>
+                      </a:pPr>
+                      <a:r>
+                        <a:rPr/>
+                        <a:t>55%</a:t>
+                      </a:r>
+                    </a:p>
+                  </a:txBody>
+                </a:tc>
+                <a:tc>
+                  <a:txBody>
+                    <a:bodyPr/>
+                    <a:lstStyle/>
+                    <a:p>
+                      <a:pPr lvl="0" indent="0" marL="0">
+                        <a:buNone/>
+                      </a:pPr>
+                      <a:r>
+                        <a:rPr/>
+                        <a:t>61%</a:t>
+                      </a:r>
+                    </a:p>
+                  </a:txBody>
+                </a:tc>
+              </a:tr>
+              <a:tr h="0">
+                <a:tc>
+                  <a:txBody>
+                    <a:bodyPr/>
+                    <a:lstStyle/>
+                    <a:p>
+                      <a:pPr lvl="0" indent="0" marL="0">
+                        <a:buNone/>
+                      </a:pPr>
+                      <a:r>
+                        <a:rPr/>
+                        <a:t>Duniway Elementary School</a:t>
+                      </a:r>
+                    </a:p>
+                  </a:txBody>
+                </a:tc>
+                <a:tc>
+                  <a:txBody>
+                    <a:bodyPr/>
+                    <a:lstStyle/>
+                    <a:p>
+                      <a:pPr lvl="0" indent="0" marL="0">
+                        <a:buNone/>
+                      </a:pPr>
+                      <a:r>
+                        <a:rPr/>
+                        <a:t>71%</a:t>
+                      </a:r>
+                    </a:p>
+                  </a:txBody>
+                </a:tc>
+                <a:tc>
+                  <a:txBody>
+                    <a:bodyPr/>
+                    <a:lstStyle/>
+                    <a:p>
+                      <a:pPr lvl="0" indent="0" marL="0">
+                        <a:buNone/>
+                      </a:pPr>
+                      <a:r>
+                        <a:rPr/>
+                        <a:t>66%</a:t>
+                      </a:r>
+                    </a:p>
+                  </a:txBody>
+                </a:tc>
+              </a:tr>
+              <a:tr h="0">
+                <a:tc>
+                  <a:txBody>
+                    <a:bodyPr/>
+                    <a:lstStyle/>
+                    <a:p>
+                      <a:pPr lvl="0" indent="0" marL="0">
+                        <a:buNone/>
+                      </a:pPr>
+                      <a:r>
+                        <a:rPr/>
+                        <a:t>Emerson School</a:t>
+                      </a:r>
+                    </a:p>
+                  </a:txBody>
+                </a:tc>
+                <a:tc>
+                  <a:txBody>
+                    <a:bodyPr/>
+                    <a:lstStyle/>
+                    <a:p>
+                      <a:pPr lvl="0" indent="0" marL="0">
+                        <a:buNone/>
+                      </a:pPr>
+                      <a:r>
+                        <a:rPr/>
+                        <a:t>52%</a:t>
+                      </a:r>
+                    </a:p>
+                  </a:txBody>
+                </a:tc>
+                <a:tc>
+                  <a:txBody>
+                    <a:bodyPr/>
+                    <a:lstStyle/>
+                    <a:p>
+                      <a:pPr lvl="0" indent="0" marL="0">
+                        <a:buNone/>
+                      </a:pPr>
+                      <a:r>
+                        <a:rPr/>
+                        <a:t>62%</a:t>
+                      </a:r>
+                    </a:p>
+                  </a:txBody>
+                </a:tc>
+              </a:tr>
+              <a:tr h="0">
+                <a:tc>
+                  <a:txBody>
+                    <a:bodyPr/>
+                    <a:lstStyle/>
+                    <a:p>
+                      <a:pPr lvl="0" indent="0" marL="0">
+                        <a:buNone/>
+                      </a:pPr>
+                      <a:r>
+                        <a:rPr/>
+                        <a:t>Faubion Elementary School</a:t>
+                      </a:r>
+                    </a:p>
+                  </a:txBody>
+                </a:tc>
+                <a:tc>
+                  <a:txBody>
+                    <a:bodyPr/>
+                    <a:lstStyle/>
+                    <a:p>
+                      <a:pPr lvl="0" indent="0" marL="0">
+                        <a:buNone/>
+                      </a:pPr>
+                      <a:r>
+                        <a:rPr/>
+                        <a:t>21%</a:t>
+                      </a:r>
+                    </a:p>
+                  </a:txBody>
+                </a:tc>
+                <a:tc>
+                  <a:txBody>
+                    <a:bodyPr/>
+                    <a:lstStyle/>
+                    <a:p>
+                      <a:pPr lvl="0" indent="0" marL="0">
+                        <a:buNone/>
+                      </a:pPr>
+                      <a:r>
+                        <a:rPr/>
+                        <a:t>17%</a:t>
+                      </a:r>
+                    </a:p>
+                  </a:txBody>
+                </a:tc>
+              </a:tr>
+              <a:tr h="0">
+                <a:tc>
+                  <a:txBody>
+                    <a:bodyPr/>
+                    <a:lstStyle/>
+                    <a:p>
+                      <a:pPr lvl="0" indent="0" marL="0">
+                        <a:buNone/>
+                      </a:pPr>
+                      <a:r>
+                        <a:rPr/>
+                        <a:t>Forest Park Elementary School</a:t>
+                      </a:r>
+                    </a:p>
+                  </a:txBody>
+                </a:tc>
+                <a:tc>
+                  <a:txBody>
+                    <a:bodyPr/>
+                    <a:lstStyle/>
+                    <a:p>
+                      <a:pPr lvl="0" indent="0" marL="0">
+                        <a:buNone/>
+                      </a:pPr>
+                      <a:r>
+                        <a:rPr/>
+                        <a:t>70%</a:t>
+                      </a:r>
+                    </a:p>
+                  </a:txBody>
+                </a:tc>
+                <a:tc>
+                  <a:txBody>
+                    <a:bodyPr/>
+                    <a:lstStyle/>
+                    <a:p>
+                      <a:pPr lvl="0" indent="0" marL="0">
+                        <a:buNone/>
+                      </a:pPr>
+                      <a:r>
+                        <a:rPr/>
+                        <a:t>84%</a:t>
+                      </a:r>
+                    </a:p>
+                  </a:txBody>
+                </a:tc>
+              </a:tr>
+              <a:tr h="0">
+                <a:tc>
+                  <a:txBody>
+                    <a:bodyPr/>
+                    <a:lstStyle/>
+                    <a:p>
+                      <a:pPr lvl="0" indent="0" marL="0">
+                        <a:buNone/>
+                      </a:pPr>
+                      <a:r>
+                        <a:rPr/>
+                        <a:t>Glencoe Elementary School</a:t>
+                      </a:r>
+                    </a:p>
+                  </a:txBody>
+                </a:tc>
+                <a:tc>
+                  <a:txBody>
+                    <a:bodyPr/>
+                    <a:lstStyle/>
+                    <a:p>
+                      <a:pPr lvl="0" indent="0" marL="0">
+                        <a:buNone/>
+                      </a:pPr>
+                      <a:r>
+                        <a:rPr/>
+                        <a:t>70%</a:t>
+                      </a:r>
+                    </a:p>
+                  </a:txBody>
+                </a:tc>
+                <a:tc>
+                  <a:txBody>
+                    <a:bodyPr/>
+                    <a:lstStyle/>
+                    <a:p>
+                      <a:pPr lvl="0" indent="0" marL="0">
+                        <a:buNone/>
+                      </a:pPr>
+                      <a:r>
+                        <a:rPr/>
+                        <a:t>57%</a:t>
+                      </a:r>
+                    </a:p>
+                  </a:txBody>
+                </a:tc>
+              </a:tr>
+              <a:tr h="0">
+                <a:tc>
+                  <a:txBody>
+                    <a:bodyPr/>
+                    <a:lstStyle/>
+                    <a:p>
+                      <a:pPr lvl="0" indent="0" marL="0">
+                        <a:buNone/>
+                      </a:pPr>
+                      <a:r>
+                        <a:rPr/>
+                        <a:t>Grout Elementary School</a:t>
+                      </a:r>
+                    </a:p>
+                  </a:txBody>
+                </a:tc>
+                <a:tc>
+                  <a:txBody>
+                    <a:bodyPr/>
+                    <a:lstStyle/>
+                    <a:p>
+                      <a:pPr lvl="0" indent="0" marL="0">
+                        <a:buNone/>
+                      </a:pPr>
+                      <a:r>
+                        <a:rPr/>
+                        <a:t>48%</a:t>
+                      </a:r>
+                    </a:p>
+                  </a:txBody>
+                </a:tc>
+                <a:tc>
+                  <a:txBody>
+                    <a:bodyPr/>
+                    <a:lstStyle/>
+                    <a:p>
+                      <a:pPr lvl="0" indent="0" marL="0">
+                        <a:buNone/>
+                      </a:pPr>
+                      <a:r>
+                        <a:rPr/>
+                        <a:t>54%</a:t>
+                      </a:r>
+                    </a:p>
+                  </a:txBody>
+                </a:tc>
+              </a:tr>
+              <a:tr h="0">
+                <a:tc>
+                  <a:txBody>
+                    <a:bodyPr/>
+                    <a:lstStyle/>
+                    <a:p>
+                      <a:pPr lvl="0" indent="0" marL="0">
+                        <a:buNone/>
+                      </a:pPr>
+                      <a:r>
+                        <a:rPr/>
+                        <a:t>Harrison Park School</a:t>
+                      </a:r>
+                    </a:p>
+                  </a:txBody>
+                </a:tc>
+                <a:tc>
+                  <a:txBody>
+                    <a:bodyPr/>
+                    <a:lstStyle/>
+                    <a:p>
+                      <a:pPr lvl="0" indent="0" marL="0">
+                        <a:buNone/>
+                      </a:pPr>
+                      <a:r>
+                        <a:rPr/>
+                        <a:t>16%</a:t>
+                      </a:r>
+                    </a:p>
+                  </a:txBody>
+                </a:tc>
+                <a:tc>
+                  <a:txBody>
+                    <a:bodyPr/>
+                    <a:lstStyle/>
+                    <a:p>
+                      <a:pPr lvl="0" indent="0" marL="0">
+                        <a:buNone/>
+                      </a:pPr>
+                      <a:r>
+                        <a:rPr/>
+                        <a:t>35%</a:t>
+                      </a:r>
+                    </a:p>
+                  </a:txBody>
+                </a:tc>
+              </a:tr>
+              <a:tr h="0">
+                <a:tc>
+                  <a:txBody>
+                    <a:bodyPr/>
+                    <a:lstStyle/>
+                    <a:p>
+                      <a:pPr lvl="0" indent="0" marL="0">
+                        <a:buNone/>
+                      </a:pPr>
+                      <a:r>
+                        <a:rPr/>
+                        <a:t>Hayhurst Elementary School</a:t>
+                      </a:r>
+                    </a:p>
+                  </a:txBody>
+                </a:tc>
+                <a:tc>
+                  <a:txBody>
+                    <a:bodyPr/>
+                    <a:lstStyle/>
+                    <a:p>
+                      <a:pPr lvl="0" indent="0" marL="0">
+                        <a:buNone/>
+                      </a:pPr>
+                      <a:r>
+                        <a:rPr/>
+                        <a:t>67%</a:t>
+                      </a:r>
+                    </a:p>
+                  </a:txBody>
+                </a:tc>
+                <a:tc>
+                  <a:txBody>
+                    <a:bodyPr/>
+                    <a:lstStyle/>
+                    <a:p>
+                      <a:pPr lvl="0" indent="0" marL="0">
+                        <a:buNone/>
+                      </a:pPr>
+                      <a:r>
+                        <a:rPr/>
+                        <a:t>66%</a:t>
+                      </a:r>
+                    </a:p>
+                  </a:txBody>
+                </a:tc>
+              </a:tr>
+              <a:tr h="0">
+                <a:tc>
+                  <a:txBody>
+                    <a:bodyPr/>
+                    <a:lstStyle/>
+                    <a:p>
+                      <a:pPr lvl="0" indent="0" marL="0">
+                        <a:buNone/>
+                      </a:pPr>
+                      <a:r>
+                        <a:rPr/>
+                        <a:t>Irvington Elementary School</a:t>
+                      </a:r>
+                    </a:p>
+                  </a:txBody>
+                </a:tc>
+                <a:tc>
+                  <a:txBody>
+                    <a:bodyPr/>
+                    <a:lstStyle/>
+                    <a:p>
+                      <a:pPr lvl="0" indent="0" marL="0">
+                        <a:buNone/>
+                      </a:pPr>
+                      <a:r>
+                        <a:rPr/>
+                        <a:t>64%</a:t>
+                      </a:r>
+                    </a:p>
+                  </a:txBody>
+                </a:tc>
+                <a:tc>
+                  <a:txBody>
+                    <a:bodyPr/>
+                    <a:lstStyle/>
+                    <a:p>
+                      <a:pPr lvl="0" indent="0" marL="0">
+                        <a:buNone/>
+                      </a:pPr>
+                      <a:r>
+                        <a:rPr/>
+                        <a:t>50%</a:t>
+                      </a:r>
+                    </a:p>
+                  </a:txBody>
+                </a:tc>
+              </a:tr>
+              <a:tr h="0">
+                <a:tc>
+                  <a:txBody>
+                    <a:bodyPr/>
+                    <a:lstStyle/>
+                    <a:p>
+                      <a:pPr lvl="0" indent="0" marL="0">
+                        <a:buNone/>
+                      </a:pPr>
+                      <a:r>
+                        <a:rPr/>
+                        <a:t>James John Elementary School</a:t>
+                      </a:r>
+                    </a:p>
+                  </a:txBody>
+                </a:tc>
+                <a:tc>
+                  <a:txBody>
+                    <a:bodyPr/>
+                    <a:lstStyle/>
+                    <a:p>
+                      <a:pPr lvl="0" indent="0" marL="0">
+                        <a:buNone/>
+                      </a:pPr>
+                      <a:r>
+                        <a:rPr/>
+                        <a:t>42%</a:t>
+                      </a:r>
+                    </a:p>
+                  </a:txBody>
+                </a:tc>
+                <a:tc>
+                  <a:txBody>
+                    <a:bodyPr/>
+                    <a:lstStyle/>
+                    <a:p>
+                      <a:pPr lvl="0" indent="0" marL="0">
+                        <a:buNone/>
+                      </a:pPr>
+                      <a:r>
+                        <a:rPr/>
+                        <a:t>40%</a:t>
+                      </a:r>
+                    </a:p>
+                  </a:txBody>
+                </a:tc>
+              </a:tr>
+              <a:tr h="0">
+                <a:tc>
+                  <a:txBody>
+                    <a:bodyPr/>
+                    <a:lstStyle/>
+                    <a:p>
+                      <a:pPr lvl="0" indent="0" marL="0">
+                        <a:buNone/>
+                      </a:pPr>
+                      <a:r>
+                        <a:rPr/>
+                        <a:t>Kairos PDX</a:t>
+                      </a:r>
+                    </a:p>
+                  </a:txBody>
+                </a:tc>
+                <a:tc>
+                  <a:txBody>
+                    <a:bodyPr/>
+                    <a:lstStyle/>
+                    <a:p>
+                      <a:pPr lvl="0" indent="0" marL="0">
+                        <a:buNone/>
+                      </a:pPr>
+                      <a:r>
+                        <a:rPr/>
+                        <a:t>8%</a:t>
+                      </a:r>
+                    </a:p>
+                  </a:txBody>
+                </a:tc>
+                <a:tc>
+                  <a:txBody>
+                    <a:bodyPr/>
+                    <a:lstStyle/>
+                    <a:p>
+                      <a:pPr lvl="0" indent="0" marL="0">
+                        <a:buNone/>
+                      </a:pPr>
+                      <a:r>
+                        <a:rPr/>
+                        <a:t>52%</a:t>
+                      </a:r>
+                    </a:p>
+                  </a:txBody>
+                </a:tc>
+              </a:tr>
+              <a:tr h="0">
+                <a:tc>
+                  <a:txBody>
+                    <a:bodyPr/>
+                    <a:lstStyle/>
+                    <a:p>
+                      <a:pPr lvl="0" indent="0" marL="0">
+                        <a:buNone/>
+                      </a:pPr>
+                      <a:r>
+                        <a:rPr/>
+                        <a:t>Kelly Elementary School</a:t>
+                      </a:r>
+                    </a:p>
+                  </a:txBody>
+                </a:tc>
+                <a:tc>
+                  <a:txBody>
+                    <a:bodyPr/>
+                    <a:lstStyle/>
+                    <a:p>
+                      <a:pPr lvl="0" indent="0" marL="0">
+                        <a:buNone/>
+                      </a:pPr>
+                      <a:r>
+                        <a:rPr/>
+                        <a:t>23%</a:t>
+                      </a:r>
+                    </a:p>
+                  </a:txBody>
+                </a:tc>
+                <a:tc>
+                  <a:txBody>
+                    <a:bodyPr/>
+                    <a:lstStyle/>
+                    <a:p>
+                      <a:pPr lvl="0" indent="0" marL="0">
+                        <a:buNone/>
+                      </a:pPr>
+                      <a:r>
+                        <a:rPr/>
+                        <a:t>29%</a:t>
+                      </a:r>
+                    </a:p>
+                  </a:txBody>
+                </a:tc>
+              </a:tr>
+              <a:tr h="0">
+                <a:tc>
+                  <a:txBody>
+                    <a:bodyPr/>
+                    <a:lstStyle/>
+                    <a:p>
+                      <a:pPr lvl="0" indent="0" marL="0">
+                        <a:buNone/>
+                      </a:pPr>
+                      <a:r>
+                        <a:rPr/>
+                        <a:t>Laurelhurst Elementary School</a:t>
+                      </a:r>
+                    </a:p>
+                  </a:txBody>
+                </a:tc>
+                <a:tc>
+                  <a:txBody>
+                    <a:bodyPr/>
+                    <a:lstStyle/>
+                    <a:p>
+                      <a:pPr lvl="0" indent="0" marL="0">
+                        <a:buNone/>
+                      </a:pPr>
+                      <a:r>
+                        <a:rPr/>
+                        <a:t>68%</a:t>
+                      </a:r>
+                    </a:p>
+                  </a:txBody>
+                </a:tc>
+                <a:tc>
+                  <a:txBody>
+                    <a:bodyPr/>
+                    <a:lstStyle/>
+                    <a:p>
+                      <a:pPr lvl="0" indent="0" marL="0">
+                        <a:buNone/>
+                      </a:pPr>
+                      <a:r>
+                        <a:rPr/>
+                        <a:t>59%</a:t>
+                      </a:r>
+                    </a:p>
+                  </a:txBody>
+                </a:tc>
+              </a:tr>
+              <a:tr h="0">
+                <a:tc>
+                  <a:txBody>
+                    <a:bodyPr/>
+                    <a:lstStyle/>
+                    <a:p>
+                      <a:pPr lvl="0" indent="0" marL="0">
+                        <a:buNone/>
+                      </a:pPr>
+                      <a:r>
+                        <a:rPr/>
+                        <a:t>Le Monde French Immersion Public Charter School</a:t>
+                      </a:r>
+                    </a:p>
+                  </a:txBody>
+                </a:tc>
+                <a:tc>
+                  <a:txBody>
+                    <a:bodyPr/>
+                    <a:lstStyle/>
+                    <a:p>
+                      <a:pPr lvl="0" indent="0" marL="0">
+                        <a:buNone/>
+                      </a:pPr>
+                      <a:r>
+                        <a:rPr/>
+                        <a:t>84%</a:t>
+                      </a:r>
+                    </a:p>
+                  </a:txBody>
+                </a:tc>
+                <a:tc>
+                  <a:txBody>
+                    <a:bodyPr/>
+                    <a:lstStyle/>
+                    <a:p>
+                      <a:pPr lvl="0" indent="0" marL="0">
+                        <a:buNone/>
+                      </a:pPr>
+                      <a:r>
+                        <a:rPr/>
+                        <a:t>77%</a:t>
+                      </a:r>
+                    </a:p>
+                  </a:txBody>
+                </a:tc>
+              </a:tr>
+              <a:tr h="0">
+                <a:tc>
+                  <a:txBody>
+                    <a:bodyPr/>
+                    <a:lstStyle/>
+                    <a:p>
+                      <a:pPr lvl="0" indent="0" marL="0">
+                        <a:buNone/>
+                      </a:pPr>
+                      <a:r>
+                        <a:rPr/>
+                        <a:t>Lee Elementary School</a:t>
+                      </a:r>
+                    </a:p>
+                  </a:txBody>
+                </a:tc>
+                <a:tc>
+                  <a:txBody>
+                    <a:bodyPr/>
+                    <a:lstStyle/>
+                    <a:p>
+                      <a:pPr lvl="0" indent="0" marL="0">
+                        <a:buNone/>
+                      </a:pPr>
+                      <a:r>
+                        <a:rPr/>
+                        <a:t>22%</a:t>
+                      </a:r>
+                    </a:p>
+                  </a:txBody>
+                </a:tc>
+                <a:tc>
+                  <a:txBody>
+                    <a:bodyPr/>
+                    <a:lstStyle/>
+                    <a:p>
+                      <a:pPr lvl="0" indent="0" marL="0">
+                        <a:buNone/>
+                      </a:pPr>
+                      <a:r>
+                        <a:rPr/>
+                        <a:t>50%</a:t>
+                      </a:r>
+                    </a:p>
+                  </a:txBody>
+                </a:tc>
+              </a:tr>
+              <a:tr h="0">
+                <a:tc>
+                  <a:txBody>
+                    <a:bodyPr/>
+                    <a:lstStyle/>
+                    <a:p>
+                      <a:pPr lvl="0" indent="0" marL="0">
+                        <a:buNone/>
+                      </a:pPr>
+                      <a:r>
+                        <a:rPr/>
+                        <a:t>Lent Elementary School</a:t>
+                      </a:r>
+                    </a:p>
+                  </a:txBody>
+                </a:tc>
+                <a:tc>
+                  <a:txBody>
+                    <a:bodyPr/>
+                    <a:lstStyle/>
+                    <a:p>
+                      <a:pPr lvl="0" indent="0" marL="0">
+                        <a:buNone/>
+                      </a:pPr>
+                      <a:r>
+                        <a:rPr/>
+                        <a:t>11%</a:t>
+                      </a:r>
+                    </a:p>
+                  </a:txBody>
+                </a:tc>
+                <a:tc>
+                  <a:txBody>
+                    <a:bodyPr/>
+                    <a:lstStyle/>
+                    <a:p>
+                      <a:pPr lvl="0" indent="0" marL="0">
+                        <a:buNone/>
+                      </a:pPr>
+                      <a:r>
+                        <a:rPr/>
+                        <a:t>11%</a:t>
+                      </a:r>
+                    </a:p>
+                  </a:txBody>
+                </a:tc>
+              </a:tr>
+              <a:tr h="0">
+                <a:tc>
+                  <a:txBody>
+                    <a:bodyPr/>
+                    <a:lstStyle/>
+                    <a:p>
+                      <a:pPr lvl="0" indent="0" marL="0">
+                        <a:buNone/>
+                      </a:pPr>
+                      <a:r>
+                        <a:rPr/>
+                        <a:t>Lewis Elementary School</a:t>
+                      </a:r>
+                    </a:p>
+                  </a:txBody>
+                </a:tc>
+                <a:tc>
+                  <a:txBody>
+                    <a:bodyPr/>
+                    <a:lstStyle/>
+                    <a:p>
+                      <a:pPr lvl="0" indent="0" marL="0">
+                        <a:buNone/>
+                      </a:pPr>
+                      <a:r>
+                        <a:rPr/>
+                        <a:t>55%</a:t>
+                      </a:r>
+                    </a:p>
+                  </a:txBody>
+                </a:tc>
+                <a:tc>
+                  <a:txBody>
+                    <a:bodyPr/>
+                    <a:lstStyle/>
+                    <a:p>
+                      <a:pPr lvl="0" indent="0" marL="0">
+                        <a:buNone/>
+                      </a:pPr>
+                      <a:r>
+                        <a:rPr/>
+                        <a:t>63%</a:t>
+                      </a:r>
+                    </a:p>
+                  </a:txBody>
+                </a:tc>
+              </a:tr>
+              <a:tr h="0">
+                <a:tc>
+                  <a:txBody>
+                    <a:bodyPr/>
+                    <a:lstStyle/>
+                    <a:p>
+                      <a:pPr lvl="0" indent="0" marL="0">
+                        <a:buNone/>
+                      </a:pPr>
+                      <a:r>
+                        <a:rPr/>
+                        <a:t>Llewellyn Elementary School</a:t>
+                      </a:r>
+                    </a:p>
+                  </a:txBody>
+                </a:tc>
+                <a:tc>
+                  <a:txBody>
+                    <a:bodyPr/>
+                    <a:lstStyle/>
+                    <a:p>
+                      <a:pPr lvl="0" indent="0" marL="0">
+                        <a:buNone/>
+                      </a:pPr>
+                      <a:r>
+                        <a:rPr/>
+                        <a:t>79%</a:t>
+                      </a:r>
+                    </a:p>
+                  </a:txBody>
+                </a:tc>
+                <a:tc>
+                  <a:txBody>
+                    <a:bodyPr/>
+                    <a:lstStyle/>
+                    <a:p>
+                      <a:pPr lvl="0" indent="0" marL="0">
+                        <a:buNone/>
+                      </a:pPr>
+                      <a:r>
+                        <a:rPr/>
+                        <a:t>81%</a:t>
+                      </a:r>
+                    </a:p>
+                  </a:txBody>
+                </a:tc>
+              </a:tr>
+              <a:tr h="0">
+                <a:tc>
+                  <a:txBody>
+                    <a:bodyPr/>
+                    <a:lstStyle/>
+                    <a:p>
+                      <a:pPr lvl="0" indent="0" marL="0">
+                        <a:buNone/>
+                      </a:pPr>
+                      <a:r>
+                        <a:rPr/>
+                        <a:t>Maplewood Elementary School</a:t>
+                      </a:r>
+                    </a:p>
+                  </a:txBody>
+                </a:tc>
+                <a:tc>
+                  <a:txBody>
+                    <a:bodyPr/>
+                    <a:lstStyle/>
+                    <a:p>
+                      <a:pPr lvl="0" indent="0" marL="0">
+                        <a:buNone/>
+                      </a:pPr>
+                      <a:r>
+                        <a:rPr/>
+                        <a:t>44%</a:t>
+                      </a:r>
+                    </a:p>
+                  </a:txBody>
+                </a:tc>
+                <a:tc>
+                  <a:txBody>
+                    <a:bodyPr/>
+                    <a:lstStyle/>
+                    <a:p>
+                      <a:pPr lvl="0" indent="0" marL="0">
+                        <a:buNone/>
+                      </a:pPr>
+                      <a:r>
+                        <a:rPr/>
+                        <a:t>66%</a:t>
+                      </a:r>
+                    </a:p>
+                  </a:txBody>
+                </a:tc>
+              </a:tr>
+              <a:tr h="0">
+                <a:tc>
+                  <a:txBody>
+                    <a:bodyPr/>
+                    <a:lstStyle/>
+                    <a:p>
+                      <a:pPr lvl="0" indent="0" marL="0">
+                        <a:buNone/>
+                      </a:pPr>
+                      <a:r>
+                        <a:rPr/>
+                        <a:t>Markham Elementary School</a:t>
+                      </a:r>
+                    </a:p>
+                  </a:txBody>
+                </a:tc>
+                <a:tc>
+                  <a:txBody>
+                    <a:bodyPr/>
+                    <a:lstStyle/>
+                    <a:p>
+                      <a:pPr lvl="0" indent="0" marL="0">
+                        <a:buNone/>
+                      </a:pPr>
+                      <a:r>
+                        <a:rPr/>
+                        <a:t>71%</a:t>
+                      </a:r>
+                    </a:p>
+                  </a:txBody>
+                </a:tc>
+                <a:tc>
+                  <a:txBody>
+                    <a:bodyPr/>
+                    <a:lstStyle/>
+                    <a:p>
+                      <a:pPr lvl="0" indent="0" marL="0">
+                        <a:buNone/>
+                      </a:pPr>
+                      <a:r>
+                        <a:rPr/>
+                        <a:t>45%</a:t>
+                      </a:r>
+                    </a:p>
+                  </a:txBody>
+                </a:tc>
+              </a:tr>
+              <a:tr h="0">
+                <a:tc>
+                  <a:txBody>
+                    <a:bodyPr/>
+                    <a:lstStyle/>
+                    <a:p>
+                      <a:pPr lvl="0" indent="0" marL="0">
+                        <a:buNone/>
+                      </a:pPr>
+                      <a:r>
+                        <a:rPr/>
+                        <a:t>Martin Luther King Jr. School</a:t>
+                      </a:r>
+                    </a:p>
+                  </a:txBody>
+                </a:tc>
+                <a:tc>
+                  <a:txBody>
+                    <a:bodyPr/>
+                    <a:lstStyle/>
+                    <a:p>
+                      <a:pPr lvl="0" indent="0" marL="0">
+                        <a:buNone/>
+                      </a:pPr>
+                      <a:r>
+                        <a:rPr/>
+                        <a:t>9%</a:t>
+                      </a:r>
+                    </a:p>
+                  </a:txBody>
+                </a:tc>
+                <a:tc>
+                  <a:txBody>
+                    <a:bodyPr/>
+                    <a:lstStyle/>
+                    <a:p>
+                      <a:pPr lvl="0" indent="0" marL="0">
+                        <a:buNone/>
+                      </a:pPr>
+                      <a:r>
+                        <a:rPr/>
+                        <a:t>37%</a:t>
+                      </a:r>
+                    </a:p>
+                  </a:txBody>
+                </a:tc>
+              </a:tr>
+              <a:tr h="0">
+                <a:tc>
+                  <a:txBody>
+                    <a:bodyPr/>
+                    <a:lstStyle/>
+                    <a:p>
+                      <a:pPr lvl="0" indent="0" marL="0">
+                        <a:buNone/>
+                      </a:pPr>
+                      <a:r>
+                        <a:rPr/>
+                        <a:t>Marysville Elementary School</a:t>
+                      </a:r>
+                    </a:p>
+                  </a:txBody>
+                </a:tc>
+                <a:tc>
+                  <a:txBody>
+                    <a:bodyPr/>
+                    <a:lstStyle/>
+                    <a:p>
+                      <a:pPr lvl="0" indent="0" marL="0">
+                        <a:buNone/>
+                      </a:pPr>
+                      <a:r>
+                        <a:rPr/>
+                        <a:t>25%</a:t>
+                      </a:r>
+                    </a:p>
+                  </a:txBody>
+                </a:tc>
+                <a:tc>
+                  <a:txBody>
+                    <a:bodyPr/>
+                    <a:lstStyle/>
+                    <a:p>
+                      <a:pPr lvl="0" indent="0" marL="0">
+                        <a:buNone/>
+                      </a:pPr>
+                      <a:r>
+                        <a:rPr/>
+                        <a:t>37%</a:t>
+                      </a:r>
+                    </a:p>
+                  </a:txBody>
+                </a:tc>
+              </a:tr>
+              <a:tr h="0">
+                <a:tc>
+                  <a:txBody>
+                    <a:bodyPr/>
+                    <a:lstStyle/>
+                    <a:p>
+                      <a:pPr lvl="0" indent="0" marL="0">
+                        <a:buNone/>
+                      </a:pPr>
+                      <a:r>
+                        <a:rPr/>
+                        <a:t>Metropolitan Learning Center</a:t>
+                      </a:r>
+                    </a:p>
+                  </a:txBody>
+                </a:tc>
+                <a:tc>
+                  <a:txBody>
+                    <a:bodyPr/>
+                    <a:lstStyle/>
+                    <a:p>
+                      <a:pPr lvl="0" indent="0" marL="0">
+                        <a:buNone/>
+                      </a:pPr>
+                      <a:r>
+                        <a:rPr/>
+                        <a:t>43%</a:t>
+                      </a:r>
+                    </a:p>
+                  </a:txBody>
+                </a:tc>
+                <a:tc>
+                  <a:txBody>
+                    <a:bodyPr/>
+                    <a:lstStyle/>
+                    <a:p>
+                      <a:pPr lvl="0" indent="0" marL="0">
+                        <a:buNone/>
+                      </a:pPr>
+                      <a:r>
+                        <a:rPr/>
+                        <a:t>62%</a:t>
+                      </a:r>
+                    </a:p>
+                  </a:txBody>
+                </a:tc>
+              </a:tr>
+              <a:tr h="0">
+                <a:tc>
+                  <a:txBody>
+                    <a:bodyPr/>
+                    <a:lstStyle/>
+                    <a:p>
+                      <a:pPr lvl="0" indent="0" marL="0">
+                        <a:buNone/>
+                      </a:pPr>
+                      <a:r>
+                        <a:rPr/>
+                        <a:t>Opal School of the Portland Children's Museum</a:t>
+                      </a:r>
+                    </a:p>
+                  </a:txBody>
+                </a:tc>
+                <a:tc>
+                  <a:txBody>
+                    <a:bodyPr/>
+                    <a:lstStyle/>
+                    <a:p>
+                      <a:pPr lvl="0" indent="0" marL="0">
+                        <a:buNone/>
+                      </a:pPr>
+                      <a:r>
+                        <a:rPr/>
+                        <a:t>29%</a:t>
+                      </a:r>
+                    </a:p>
+                  </a:txBody>
+                </a:tc>
+                <a:tc>
+                  <a:txBody>
+                    <a:bodyPr/>
+                    <a:lstStyle/>
+                    <a:p>
+                      <a:pPr lvl="0" indent="0" marL="0">
+                        <a:buNone/>
+                      </a:pPr>
+                      <a:r>
+                        <a:rPr/>
+                        <a:t>NA</a:t>
+                      </a:r>
+                    </a:p>
+                  </a:txBody>
+                </a:tc>
+              </a:tr>
+              <a:tr h="0">
+                <a:tc>
+                  <a:txBody>
+                    <a:bodyPr/>
+                    <a:lstStyle/>
+                    <a:p>
+                      <a:pPr lvl="0" indent="0" marL="0">
+                        <a:buNone/>
+                      </a:pPr>
+                      <a:r>
+                        <a:rPr/>
+                        <a:t>Peninsula Elementary School</a:t>
+                      </a:r>
+                    </a:p>
+                  </a:txBody>
+                </a:tc>
+                <a:tc>
+                  <a:txBody>
+                    <a:bodyPr/>
+                    <a:lstStyle/>
+                    <a:p>
+                      <a:pPr lvl="0" indent="0" marL="0">
+                        <a:buNone/>
+                      </a:pPr>
+                      <a:r>
+                        <a:rPr/>
+                        <a:t>27%</a:t>
+                      </a:r>
+                    </a:p>
+                  </a:txBody>
+                </a:tc>
+                <a:tc>
+                  <a:txBody>
+                    <a:bodyPr/>
+                    <a:lstStyle/>
+                    <a:p>
+                      <a:pPr lvl="0" indent="0" marL="0">
+                        <a:buNone/>
+                      </a:pPr>
+                      <a:r>
+                        <a:rPr/>
+                        <a:t>49%</a:t>
+                      </a:r>
+                    </a:p>
+                  </a:txBody>
+                </a:tc>
+              </a:tr>
+              <a:tr h="0">
+                <a:tc>
+                  <a:txBody>
+                    <a:bodyPr/>
+                    <a:lstStyle/>
+                    <a:p>
+                      <a:pPr lvl="0" indent="0" marL="0">
+                        <a:buNone/>
+                      </a:pPr>
+                      <a:r>
+                        <a:rPr/>
+                        <a:t>Portland Arthur Academy Charter School</a:t>
+                      </a:r>
+                    </a:p>
+                  </a:txBody>
+                </a:tc>
+                <a:tc>
+                  <a:txBody>
+                    <a:bodyPr/>
+                    <a:lstStyle/>
+                    <a:p>
+                      <a:pPr lvl="0" indent="0" marL="0">
+                        <a:buNone/>
+                      </a:pPr>
+                      <a:r>
+                        <a:rPr/>
+                        <a:t>43%</a:t>
+                      </a:r>
+                    </a:p>
+                  </a:txBody>
+                </a:tc>
+                <a:tc>
+                  <a:txBody>
+                    <a:bodyPr/>
+                    <a:lstStyle/>
+                    <a:p>
+                      <a:pPr lvl="0" indent="0" marL="0">
+                        <a:buNone/>
+                      </a:pPr>
+                      <a:r>
+                        <a:rPr/>
+                        <a:t>50%</a:t>
+                      </a:r>
+                    </a:p>
+                  </a:txBody>
+                </a:tc>
+              </a:tr>
+              <a:tr h="0">
+                <a:tc>
+                  <a:txBody>
+                    <a:bodyPr/>
+                    <a:lstStyle/>
+                    <a:p>
+                      <a:pPr lvl="0" indent="0" marL="0">
+                        <a:buNone/>
+                      </a:pPr>
+                      <a:r>
+                        <a:rPr/>
+                        <a:t>Portland Village School</a:t>
+                      </a:r>
+                    </a:p>
+                  </a:txBody>
+                </a:tc>
+                <a:tc>
+                  <a:txBody>
+                    <a:bodyPr/>
+                    <a:lstStyle/>
+                    <a:p>
+                      <a:pPr lvl="0" indent="0" marL="0">
+                        <a:buNone/>
+                      </a:pPr>
+                      <a:r>
+                        <a:rPr/>
+                        <a:t>56%</a:t>
+                      </a:r>
+                    </a:p>
+                  </a:txBody>
+                </a:tc>
+                <a:tc>
+                  <a:txBody>
+                    <a:bodyPr/>
+                    <a:lstStyle/>
+                    <a:p>
+                      <a:pPr lvl="0" indent="0" marL="0">
+                        <a:buNone/>
+                      </a:pPr>
+                      <a:r>
+                        <a:rPr/>
+                        <a:t>54%</a:t>
+                      </a:r>
+                    </a:p>
+                  </a:txBody>
+                </a:tc>
+              </a:tr>
+              <a:tr h="0">
+                <a:tc>
+                  <a:txBody>
+                    <a:bodyPr/>
+                    <a:lstStyle/>
+                    <a:p>
+                      <a:pPr lvl="0" indent="0" marL="0">
+                        <a:buNone/>
+                      </a:pPr>
+                      <a:r>
+                        <a:rPr/>
+                        <a:t>Richmond Elementary School</a:t>
+                      </a:r>
+                    </a:p>
+                  </a:txBody>
+                </a:tc>
+                <a:tc>
+                  <a:txBody>
+                    <a:bodyPr/>
+                    <a:lstStyle/>
+                    <a:p>
+                      <a:pPr lvl="0" indent="0" marL="0">
+                        <a:buNone/>
+                      </a:pPr>
+                      <a:r>
+                        <a:rPr/>
+                        <a:t>78%</a:t>
+                      </a:r>
+                    </a:p>
+                  </a:txBody>
+                </a:tc>
+                <a:tc>
+                  <a:txBody>
+                    <a:bodyPr/>
+                    <a:lstStyle/>
+                    <a:p>
+                      <a:pPr lvl="0" indent="0" marL="0">
+                        <a:buNone/>
+                      </a:pPr>
+                      <a:r>
+                        <a:rPr/>
+                        <a:t>73%</a:t>
+                      </a:r>
+                    </a:p>
+                  </a:txBody>
+                </a:tc>
+              </a:tr>
+              <a:tr h="0">
+                <a:tc>
+                  <a:txBody>
+                    <a:bodyPr/>
+                    <a:lstStyle/>
+                    <a:p>
+                      <a:pPr lvl="0" indent="0" marL="0">
+                        <a:buNone/>
+                      </a:pPr>
+                      <a:r>
+                        <a:rPr/>
+                        <a:t>Rieke Elementary School</a:t>
+                      </a:r>
+                    </a:p>
+                  </a:txBody>
+                </a:tc>
+                <a:tc>
+                  <a:txBody>
+                    <a:bodyPr/>
+                    <a:lstStyle/>
+                    <a:p>
+                      <a:pPr lvl="0" indent="0" marL="0">
+                        <a:buNone/>
+                      </a:pPr>
+                      <a:r>
+                        <a:rPr/>
+                        <a:t>75%</a:t>
+                      </a:r>
+                    </a:p>
+                  </a:txBody>
+                </a:tc>
+                <a:tc>
+                  <a:txBody>
+                    <a:bodyPr/>
+                    <a:lstStyle/>
+                    <a:p>
+                      <a:pPr lvl="0" indent="0" marL="0">
+                        <a:buNone/>
+                      </a:pPr>
+                      <a:r>
+                        <a:rPr/>
+                        <a:t>78%</a:t>
+                      </a:r>
+                    </a:p>
+                  </a:txBody>
+                </a:tc>
+              </a:tr>
+              <a:tr h="0">
+                <a:tc>
+                  <a:txBody>
+                    <a:bodyPr/>
+                    <a:lstStyle/>
+                    <a:p>
+                      <a:pPr lvl="0" indent="0" marL="0">
+                        <a:buNone/>
+                      </a:pPr>
+                      <a:r>
+                        <a:rPr/>
+                        <a:t>Rigler Elementary School</a:t>
+                      </a:r>
+                    </a:p>
+                  </a:txBody>
+                </a:tc>
+                <a:tc>
+                  <a:txBody>
+                    <a:bodyPr/>
+                    <a:lstStyle/>
+                    <a:p>
+                      <a:pPr lvl="0" indent="0" marL="0">
+                        <a:buNone/>
+                      </a:pPr>
+                      <a:r>
+                        <a:rPr/>
+                        <a:t>7%</a:t>
+                      </a:r>
+                    </a:p>
+                  </a:txBody>
+                </a:tc>
+                <a:tc>
+                  <a:txBody>
+                    <a:bodyPr/>
+                    <a:lstStyle/>
+                    <a:p>
+                      <a:pPr lvl="0" indent="0" marL="0">
+                        <a:buNone/>
+                      </a:pPr>
+                      <a:r>
+                        <a:rPr/>
+                        <a:t>30%</a:t>
+                      </a:r>
+                    </a:p>
+                  </a:txBody>
+                </a:tc>
+              </a:tr>
+              <a:tr h="0">
+                <a:tc>
+                  <a:txBody>
+                    <a:bodyPr/>
+                    <a:lstStyle/>
+                    <a:p>
+                      <a:pPr lvl="0" indent="0" marL="0">
+                        <a:buNone/>
+                      </a:pPr>
+                      <a:r>
+                        <a:rPr/>
+                        <a:t>Rosa Parks Elementary School</a:t>
+                      </a:r>
+                    </a:p>
+                  </a:txBody>
+                </a:tc>
+                <a:tc>
+                  <a:txBody>
+                    <a:bodyPr/>
+                    <a:lstStyle/>
+                    <a:p>
+                      <a:pPr lvl="0" indent="0" marL="0">
+                        <a:buNone/>
+                      </a:pPr>
+                      <a:r>
+                        <a:rPr/>
+                        <a:t>15%</a:t>
+                      </a:r>
+                    </a:p>
+                  </a:txBody>
+                </a:tc>
+                <a:tc>
+                  <a:txBody>
+                    <a:bodyPr/>
+                    <a:lstStyle/>
+                    <a:p>
+                      <a:pPr lvl="0" indent="0" marL="0">
+                        <a:buNone/>
+                      </a:pPr>
+                      <a:r>
+                        <a:rPr/>
+                        <a:t>8%</a:t>
+                      </a:r>
+                    </a:p>
+                  </a:txBody>
+                </a:tc>
+              </a:tr>
+              <a:tr h="0">
+                <a:tc>
+                  <a:txBody>
+                    <a:bodyPr/>
+                    <a:lstStyle/>
+                    <a:p>
+                      <a:pPr lvl="0" indent="0" marL="0">
+                        <a:buNone/>
+                      </a:pPr>
+                      <a:r>
+                        <a:rPr/>
+                        <a:t>Rose City Park</a:t>
+                      </a:r>
+                    </a:p>
+                  </a:txBody>
+                </a:tc>
+                <a:tc>
+                  <a:txBody>
+                    <a:bodyPr/>
+                    <a:lstStyle/>
+                    <a:p>
+                      <a:pPr lvl="0" indent="0" marL="0">
+                        <a:buNone/>
+                      </a:pPr>
+                      <a:r>
+                        <a:rPr/>
+                        <a:t>63%</a:t>
+                      </a:r>
+                    </a:p>
+                  </a:txBody>
+                </a:tc>
+                <a:tc>
+                  <a:txBody>
+                    <a:bodyPr/>
+                    <a:lstStyle/>
+                    <a:p>
+                      <a:pPr lvl="0" indent="0" marL="0">
+                        <a:buNone/>
+                      </a:pPr>
+                      <a:r>
+                        <a:rPr/>
+                        <a:t>72%</a:t>
+                      </a:r>
+                    </a:p>
+                  </a:txBody>
+                </a:tc>
+              </a:tr>
+              <a:tr h="0">
+                <a:tc>
+                  <a:txBody>
+                    <a:bodyPr/>
+                    <a:lstStyle/>
+                    <a:p>
+                      <a:pPr lvl="0" indent="0" marL="0">
+                        <a:buNone/>
+                      </a:pPr>
+                      <a:r>
+                        <a:rPr/>
+                        <a:t>Sabin Elementary School</a:t>
+                      </a:r>
+                    </a:p>
+                  </a:txBody>
+                </a:tc>
+                <a:tc>
+                  <a:txBody>
+                    <a:bodyPr/>
+                    <a:lstStyle/>
+                    <a:p>
+                      <a:pPr lvl="0" indent="0" marL="0">
+                        <a:buNone/>
+                      </a:pPr>
+                      <a:r>
+                        <a:rPr/>
+                        <a:t>62%</a:t>
+                      </a:r>
+                    </a:p>
+                  </a:txBody>
+                </a:tc>
+                <a:tc>
+                  <a:txBody>
+                    <a:bodyPr/>
+                    <a:lstStyle/>
+                    <a:p>
+                      <a:pPr lvl="0" indent="0" marL="0">
+                        <a:buNone/>
+                      </a:pPr>
+                      <a:r>
+                        <a:rPr/>
+                        <a:t>62%</a:t>
+                      </a:r>
+                    </a:p>
+                  </a:txBody>
+                </a:tc>
+              </a:tr>
+              <a:tr h="0">
+                <a:tc>
+                  <a:txBody>
+                    <a:bodyPr/>
+                    <a:lstStyle/>
+                    <a:p>
+                      <a:pPr lvl="0" indent="0" marL="0">
+                        <a:buNone/>
+                      </a:pPr>
+                      <a:r>
+                        <a:rPr/>
+                        <a:t>Scott Elementary School</a:t>
+                      </a:r>
+                    </a:p>
+                  </a:txBody>
+                </a:tc>
+                <a:tc>
+                  <a:txBody>
+                    <a:bodyPr/>
+                    <a:lstStyle/>
+                    <a:p>
+                      <a:pPr lvl="0" indent="0" marL="0">
+                        <a:buNone/>
+                      </a:pPr>
+                      <a:r>
+                        <a:rPr/>
+                        <a:t>27%</a:t>
+                      </a:r>
+                    </a:p>
+                  </a:txBody>
+                </a:tc>
+                <a:tc>
+                  <a:txBody>
+                    <a:bodyPr/>
+                    <a:lstStyle/>
+                    <a:p>
+                      <a:pPr lvl="0" indent="0" marL="0">
+                        <a:buNone/>
+                      </a:pPr>
+                      <a:r>
+                        <a:rPr/>
+                        <a:t>47%</a:t>
+                      </a:r>
+                    </a:p>
+                  </a:txBody>
+                </a:tc>
+              </a:tr>
+              <a:tr h="0">
+                <a:tc>
+                  <a:txBody>
+                    <a:bodyPr/>
+                    <a:lstStyle/>
+                    <a:p>
+                      <a:pPr lvl="0" indent="0" marL="0">
+                        <a:buNone/>
+                      </a:pPr>
+                      <a:r>
+                        <a:rPr/>
+                        <a:t>Sitton Elementary School</a:t>
+                      </a:r>
+                    </a:p>
+                  </a:txBody>
+                </a:tc>
+                <a:tc>
+                  <a:txBody>
+                    <a:bodyPr/>
+                    <a:lstStyle/>
+                    <a:p>
+                      <a:pPr lvl="0" indent="0" marL="0">
+                        <a:buNone/>
+                      </a:pPr>
+                      <a:r>
+                        <a:rPr/>
+                        <a:t>15%</a:t>
+                      </a:r>
+                    </a:p>
+                  </a:txBody>
+                </a:tc>
+                <a:tc>
+                  <a:txBody>
+                    <a:bodyPr/>
+                    <a:lstStyle/>
+                    <a:p>
+                      <a:pPr lvl="0" indent="0" marL="0">
+                        <a:buNone/>
+                      </a:pPr>
+                      <a:r>
+                        <a:rPr/>
+                        <a:t>30%</a:t>
+                      </a:r>
+                    </a:p>
+                  </a:txBody>
+                </a:tc>
+              </a:tr>
+              <a:tr h="0">
+                <a:tc>
+                  <a:txBody>
+                    <a:bodyPr/>
+                    <a:lstStyle/>
+                    <a:p>
+                      <a:pPr lvl="0" indent="0" marL="0">
+                        <a:buNone/>
+                      </a:pPr>
+                      <a:r>
+                        <a:rPr/>
+                        <a:t>Skyline Elementary School</a:t>
+                      </a:r>
+                    </a:p>
+                  </a:txBody>
+                </a:tc>
+                <a:tc>
+                  <a:txBody>
+                    <a:bodyPr/>
+                    <a:lstStyle/>
+                    <a:p>
+                      <a:pPr lvl="0" indent="0" marL="0">
+                        <a:buNone/>
+                      </a:pPr>
+                      <a:r>
+                        <a:rPr/>
+                        <a:t>50%</a:t>
+                      </a:r>
+                    </a:p>
+                  </a:txBody>
+                </a:tc>
+                <a:tc>
+                  <a:txBody>
+                    <a:bodyPr/>
+                    <a:lstStyle/>
+                    <a:p>
+                      <a:pPr lvl="0" indent="0" marL="0">
+                        <a:buNone/>
+                      </a:pPr>
+                      <a:r>
+                        <a:rPr/>
+                        <a:t>80%</a:t>
+                      </a:r>
+                    </a:p>
+                  </a:txBody>
+                </a:tc>
+              </a:tr>
+              <a:tr h="0">
+                <a:tc>
+                  <a:txBody>
+                    <a:bodyPr/>
+                    <a:lstStyle/>
+                    <a:p>
+                      <a:pPr lvl="0" indent="0" marL="0">
+                        <a:buNone/>
+                      </a:pPr>
+                      <a:r>
+                        <a:rPr/>
+                        <a:t>Stephenson Elementary School</a:t>
+                      </a:r>
+                    </a:p>
+                  </a:txBody>
+                </a:tc>
+                <a:tc>
+                  <a:txBody>
+                    <a:bodyPr/>
+                    <a:lstStyle/>
+                    <a:p>
+                      <a:pPr lvl="0" indent="0" marL="0">
+                        <a:buNone/>
+                      </a:pPr>
+                      <a:r>
+                        <a:rPr/>
+                        <a:t>80%</a:t>
+                      </a:r>
+                    </a:p>
+                  </a:txBody>
+                </a:tc>
+                <a:tc>
+                  <a:txBody>
+                    <a:bodyPr/>
+                    <a:lstStyle/>
+                    <a:p>
+                      <a:pPr lvl="0" indent="0" marL="0">
+                        <a:buNone/>
+                      </a:pPr>
+                      <a:r>
+                        <a:rPr/>
+                        <a:t>76%</a:t>
+                      </a:r>
+                    </a:p>
+                  </a:txBody>
+                </a:tc>
+              </a:tr>
+              <a:tr h="0">
+                <a:tc>
+                  <a:txBody>
+                    <a:bodyPr/>
+                    <a:lstStyle/>
+                    <a:p>
+                      <a:pPr lvl="0" indent="0" marL="0">
+                        <a:buNone/>
+                      </a:pPr>
+                      <a:r>
+                        <a:rPr/>
+                        <a:t>Sunnyside Environmental School</a:t>
+                      </a:r>
+                    </a:p>
+                  </a:txBody>
+                </a:tc>
+                <a:tc>
+                  <a:txBody>
+                    <a:bodyPr/>
+                    <a:lstStyle/>
+                    <a:p>
+                      <a:pPr lvl="0" indent="0" marL="0">
+                        <a:buNone/>
+                      </a:pPr>
+                      <a:r>
+                        <a:rPr/>
+                        <a:t>40%</a:t>
+                      </a:r>
+                    </a:p>
+                  </a:txBody>
+                </a:tc>
+                <a:tc>
+                  <a:txBody>
+                    <a:bodyPr/>
+                    <a:lstStyle/>
+                    <a:p>
+                      <a:pPr lvl="0" indent="0" marL="0">
+                        <a:buNone/>
+                      </a:pPr>
+                      <a:r>
+                        <a:rPr/>
+                        <a:t>66%</a:t>
+                      </a:r>
+                    </a:p>
+                  </a:txBody>
+                </a:tc>
+              </a:tr>
+              <a:tr h="0">
+                <a:tc>
+                  <a:txBody>
+                    <a:bodyPr/>
+                    <a:lstStyle/>
+                    <a:p>
+                      <a:pPr lvl="0" indent="0" marL="0">
+                        <a:buNone/>
+                      </a:pPr>
+                      <a:r>
+                        <a:rPr/>
+                        <a:t>Trillium</a:t>
+                      </a:r>
+                    </a:p>
+                  </a:txBody>
+                </a:tc>
+                <a:tc>
+                  <a:txBody>
+                    <a:bodyPr/>
+                    <a:lstStyle/>
+                    <a:p>
+                      <a:pPr lvl="0" indent="0" marL="0">
+                        <a:buNone/>
+                      </a:pPr>
+                      <a:r>
+                        <a:rPr/>
+                        <a:t>29%</a:t>
+                      </a:r>
+                    </a:p>
+                  </a:txBody>
+                </a:tc>
+                <a:tc>
+                  <a:txBody>
+                    <a:bodyPr/>
+                    <a:lstStyle/>
+                    <a:p>
+                      <a:pPr lvl="0" indent="0" marL="0">
+                        <a:buNone/>
+                      </a:pPr>
+                      <a:r>
+                        <a:rPr/>
+                        <a:t>NA</a:t>
+                      </a:r>
+                    </a:p>
+                  </a:txBody>
+                </a:tc>
+              </a:tr>
+              <a:tr h="0">
+                <a:tc>
+                  <a:txBody>
+                    <a:bodyPr/>
+                    <a:lstStyle/>
+                    <a:p>
+                      <a:pPr lvl="0" indent="0" marL="0">
+                        <a:buNone/>
+                      </a:pPr>
+                      <a:r>
+                        <a:rPr/>
+                        <a:t>Vernon Elementary School</a:t>
+                      </a:r>
+                    </a:p>
+                  </a:txBody>
+                </a:tc>
+                <a:tc>
+                  <a:txBody>
+                    <a:bodyPr/>
+                    <a:lstStyle/>
+                    <a:p>
+                      <a:pPr lvl="0" indent="0" marL="0">
+                        <a:buNone/>
+                      </a:pPr>
+                      <a:r>
+                        <a:rPr/>
+                        <a:t>52%</a:t>
+                      </a:r>
+                    </a:p>
+                  </a:txBody>
+                </a:tc>
+                <a:tc>
+                  <a:txBody>
+                    <a:bodyPr/>
+                    <a:lstStyle/>
+                    <a:p>
+                      <a:pPr lvl="0" indent="0" marL="0">
+                        <a:buNone/>
+                      </a:pPr>
+                      <a:r>
+                        <a:rPr/>
+                        <a:t>55%</a:t>
+                      </a:r>
+                    </a:p>
+                  </a:txBody>
+                </a:tc>
+              </a:tr>
+              <a:tr h="0">
+                <a:tc>
+                  <a:txBody>
+                    <a:bodyPr/>
+                    <a:lstStyle/>
+                    <a:p>
+                      <a:pPr lvl="0" indent="0" marL="0">
+                        <a:buNone/>
+                      </a:pPr>
+                      <a:r>
+                        <a:rPr/>
+                        <a:t>Vestal Elementary School</a:t>
+                      </a:r>
+                    </a:p>
+                  </a:txBody>
+                </a:tc>
+                <a:tc>
+                  <a:txBody>
+                    <a:bodyPr/>
+                    <a:lstStyle/>
+                    <a:p>
+                      <a:pPr lvl="0" indent="0" marL="0">
+                        <a:buNone/>
+                      </a:pPr>
+                      <a:r>
+                        <a:rPr/>
+                        <a:t>64%</a:t>
+                      </a:r>
+                    </a:p>
+                  </a:txBody>
+                </a:tc>
+                <a:tc>
+                  <a:txBody>
+                    <a:bodyPr/>
+                    <a:lstStyle/>
+                    <a:p>
+                      <a:pPr lvl="0" indent="0" marL="0">
+                        <a:buNone/>
+                      </a:pPr>
+                      <a:r>
+                        <a:rPr/>
+                        <a:t>55%</a:t>
+                      </a:r>
+                    </a:p>
+                  </a:txBody>
+                </a:tc>
+              </a:tr>
+              <a:tr h="0">
+                <a:tc>
+                  <a:txBody>
+                    <a:bodyPr/>
+                    <a:lstStyle/>
+                    <a:p>
+                      <a:pPr lvl="0" indent="0" marL="0">
+                        <a:buNone/>
+                      </a:pPr>
+                      <a:r>
+                        <a:rPr/>
+                        <a:t>Whitman Elementary School</a:t>
+                      </a:r>
+                    </a:p>
+                  </a:txBody>
+                </a:tc>
+                <a:tc>
+                  <a:txBody>
+                    <a:bodyPr/>
+                    <a:lstStyle/>
+                    <a:p>
+                      <a:pPr lvl="0" indent="0" marL="0">
+                        <a:buNone/>
+                      </a:pPr>
+                      <a:r>
+                        <a:rPr/>
+                        <a:t>38%</a:t>
+                      </a:r>
+                    </a:p>
+                  </a:txBody>
+                </a:tc>
+                <a:tc>
+                  <a:txBody>
+                    <a:bodyPr/>
+                    <a:lstStyle/>
+                    <a:p>
+                      <a:pPr lvl="0" indent="0" marL="0">
+                        <a:buNone/>
+                      </a:pPr>
+                      <a:r>
+                        <a:rPr/>
+                        <a:t>19%</a:t>
+                      </a:r>
+                    </a:p>
+                  </a:txBody>
+                </a:tc>
+              </a:tr>
+              <a:tr h="0">
+                <a:tc>
+                  <a:txBody>
+                    <a:bodyPr/>
+                    <a:lstStyle/>
+                    <a:p>
+                      <a:pPr lvl="0" indent="0" marL="0">
+                        <a:buNone/>
+                      </a:pPr>
+                      <a:r>
+                        <a:rPr/>
+                        <a:t>Winterhaven School</a:t>
+                      </a:r>
+                    </a:p>
+                  </a:txBody>
+                </a:tc>
+                <a:tc>
+                  <a:txBody>
+                    <a:bodyPr/>
+                    <a:lstStyle/>
+                    <a:p>
+                      <a:pPr lvl="0" indent="0" marL="0">
+                        <a:buNone/>
+                      </a:pPr>
+                      <a:r>
+                        <a:rPr/>
+                        <a:t>36%</a:t>
+                      </a:r>
+                    </a:p>
+                  </a:txBody>
+                </a:tc>
+                <a:tc>
+                  <a:txBody>
+                    <a:bodyPr/>
+                    <a:lstStyle/>
+                    <a:p>
+                      <a:pPr lvl="0" indent="0" marL="0">
+                        <a:buNone/>
+                      </a:pPr>
+                      <a:r>
+                        <a:rPr/>
+                        <a:t>84%</a:t>
+                      </a:r>
+                    </a:p>
+                  </a:txBody>
+                </a:tc>
+              </a:tr>
+              <a:tr h="0">
+                <a:tc>
+                  <a:txBody>
+                    <a:bodyPr/>
+                    <a:lstStyle/>
+                    <a:p>
+                      <a:pPr lvl="0" indent="0" marL="0">
+                        <a:buNone/>
+                      </a:pPr>
+                      <a:r>
+                        <a:rPr/>
+                        <a:t>Woodlawn Elementary School</a:t>
+                      </a:r>
+                    </a:p>
+                  </a:txBody>
+                </a:tc>
+                <a:tc>
+                  <a:txBody>
+                    <a:bodyPr/>
+                    <a:lstStyle/>
+                    <a:p>
+                      <a:pPr lvl="0" indent="0" marL="0">
+                        <a:buNone/>
+                      </a:pPr>
+                      <a:r>
+                        <a:rPr/>
+                        <a:t>47%</a:t>
+                      </a:r>
+                    </a:p>
+                  </a:txBody>
+                </a:tc>
+                <a:tc>
+                  <a:txBody>
+                    <a:bodyPr/>
+                    <a:lstStyle/>
+                    <a:p>
+                      <a:pPr lvl="0" indent="0" marL="0">
+                        <a:buNone/>
+                      </a:pPr>
+                      <a:r>
+                        <a:rPr/>
+                        <a:t>44%</a:t>
+                      </a:r>
+                    </a:p>
+                  </a:txBody>
+                </a:tc>
+              </a:tr>
+              <a:tr h="0">
+                <a:tc>
+                  <a:txBody>
+                    <a:bodyPr/>
+                    <a:lstStyle/>
+                    <a:p>
+                      <a:pPr lvl="0" indent="0" marL="0">
+                        <a:buNone/>
+                      </a:pPr>
+                      <a:r>
+                        <a:rPr/>
+                        <a:t>Woodmere Elementary School</a:t>
+                      </a:r>
+                    </a:p>
+                  </a:txBody>
+                </a:tc>
+                <a:tc>
+                  <a:txBody>
+                    <a:bodyPr/>
+                    <a:lstStyle/>
+                    <a:p>
+                      <a:pPr lvl="0" indent="0" marL="0">
+                        <a:buNone/>
+                      </a:pPr>
+                      <a:r>
+                        <a:rPr/>
+                        <a:t>21%</a:t>
+                      </a:r>
+                    </a:p>
+                  </a:txBody>
+                </a:tc>
+                <a:tc>
+                  <a:txBody>
+                    <a:bodyPr/>
+                    <a:lstStyle/>
+                    <a:p>
+                      <a:pPr lvl="0" indent="0" marL="0">
+                        <a:buNone/>
+                      </a:pPr>
+                      <a:r>
+                        <a:rPr/>
+                        <a:t>28%</a:t>
+                      </a:r>
+                    </a:p>
+                  </a:txBody>
+                </a:tc>
+              </a:tr>
+              <a:tr h="0">
+                <a:tc>
+                  <a:txBody>
+                    <a:bodyPr/>
+                    <a:lstStyle/>
+                    <a:p>
+                      <a:pPr lvl="0" indent="0" marL="0">
+                        <a:buNone/>
+                      </a:pPr>
+                      <a:r>
+                        <a:rPr/>
+                        <a:t>Woodstock Elementary School</a:t>
+                      </a:r>
+                    </a:p>
+                  </a:txBody>
+                </a:tc>
+                <a:tc>
+                  <a:txBody>
+                    <a:bodyPr/>
+                    <a:lstStyle/>
+                    <a:p>
+                      <a:pPr lvl="0" indent="0" marL="0">
+                        <a:buNone/>
+                      </a:pPr>
+                      <a:r>
+                        <a:rPr/>
+                        <a:t>70%</a:t>
+                      </a:r>
+                    </a:p>
+                  </a:txBody>
+                </a:tc>
+                <a:tc>
+                  <a:txBody>
+                    <a:bodyPr/>
+                    <a:lstStyle/>
+                    <a:p>
+                      <a:pPr lvl="0" indent="0" marL="0">
+                        <a:buNone/>
+                      </a:pPr>
+                      <a:r>
+                        <a:rPr/>
+                        <a:t>76%</a:t>
+                      </a:r>
+                    </a:p>
+                  </a:txBody>
+                </a:tc>
+              </a:tr>
+            </a:tbl>
+          </a:graphicData>
+        </a:graphic>
+      </p:graphicFrame>
+    </p:spTree>
+  </p:cSld>
+</p:sld>
+</file>
+
+<file path=ppt/slides/slide5.xml><?xml version="1.0" encoding="utf-8"?>
+<p:sld xmlns:a="http://schemas.openxmlformats.org/drawingml/2006/main" xmlns:r="http://schemas.openxmlformats.org/officeDocument/2006/relationships" xmlns:p="http://schemas.openxmlformats.org/presentationml/2006/main">
+  <p:cSld>
+    <p:spTree>
+      <p:nvGrpSpPr>
+        <p:cNvPr id="1" name=""/>
+        <p:cNvGrpSpPr/>
+        <p:nvPr/>
+      </p:nvGrpSpPr>
+      <p:grpSpPr>
+        <a:xfrm>
+          <a:off x="0" y="0"/>
+          <a:ext cx="0" cy="0"/>
+          <a:chOff x="0" y="0"/>
+          <a:chExt cx="0" cy="0"/>
+        </a:xfrm>
+      </p:grpSpPr>
+      <p:sp>
+        <p:nvSpPr>
+          <p:cNvPr id="2" name="Title 1"/>
+          <p:cNvSpPr>
+            <a:spLocks noGrp="1"/>
+          </p:cNvSpPr>
+          <p:nvPr>
+            <p:ph type="title"/>
+          </p:nvPr>
+        </p:nvSpPr>
+        <p:spPr/>
+        <p:txBody>
+          <a:bodyPr/>
+          <a:lstStyle/>
+          <a:p>
+            <a:pPr lvl="0" indent="0" marL="0">
+              <a:buNone/>
+            </a:pPr>
+            <a:r>
+              <a:rPr/>
+              <a:t>Notes</a:t>
             </a:r>
           </a:p>
         </p:txBody>
@@ -3393,27 +6655,8 @@
               <a:buNone/>
             </a:pPr>
             <a:r>
-              <a:rPr/>
-              <a:t>When you click the </a:t>
-            </a:r>
-            <a:r>
-              <a:rPr b="1"/>
-              <a:t>Render</a:t>
-            </a:r>
-            <a:r>
-              <a:rPr/>
-              <a:t> button a presentation will be generated that includes both content and the output of embedded code. You can embed code like this:</a:t>
-            </a:r>
-          </a:p>
-          <a:p>
-            <a:pPr lvl="0" indent="0">
-              <a:buNone/>
-            </a:pPr>
-            <a:r>
-              <a:rPr>
-                <a:latin typeface="Courier"/>
-              </a:rPr>
-              <a:t>[1] 2</a:t>
+              <a:rPr sz="1800"/>
+              <a:t>1. https://www.pps.net/about/portland-public-schools-information/overview</a:t>
             </a:r>
           </a:p>
         </p:txBody>
